--- a/public/lessons/year-6-maths/autumn/week-1/compare-and-order-large-numbers/teaching-powerpoint-v1.pptx
+++ b/public/lessons/year-6-maths/autumn/week-1/compare-and-order-large-numbers/teaching-powerpoint-v1.pptx
@@ -2,24 +2,24 @@
 <file path=ppt/presentation.xml><?xml version="1.0" encoding="utf-8"?>
 <p:presentation xmlns:p="http://schemas.openxmlformats.org/presentationml/2006/main">
   <p:sldMasterIdLst>
-    <p:sldMasterId xmlns:r="http://schemas.openxmlformats.org/officeDocument/2006/relationships" id="2147483648" r:id="Rb73871bb507b421e"/>
+    <p:sldMasterId xmlns:r="http://schemas.openxmlformats.org/officeDocument/2006/relationships" id="2147483648" r:id="Rbf8685bd485a49a5"/>
   </p:sldMasterIdLst>
   <p:notesMasterIdLst>
-    <p:notesMasterId xmlns:r="http://schemas.openxmlformats.org/officeDocument/2006/relationships" r:id="R0cbe02417f154717"/>
+    <p:notesMasterId xmlns:r="http://schemas.openxmlformats.org/officeDocument/2006/relationships" r:id="R6c456052d3a64236"/>
   </p:notesMasterIdLst>
   <p:sldIdLst>
-    <p:sldId xmlns:r="http://schemas.openxmlformats.org/officeDocument/2006/relationships" id="256" r:id="R1f192257631744a4"/>
-    <p:sldId xmlns:r="http://schemas.openxmlformats.org/officeDocument/2006/relationships" id="257" r:id="R6e48ae84ca9e4fed"/>
-    <p:sldId xmlns:r="http://schemas.openxmlformats.org/officeDocument/2006/relationships" id="258" r:id="R6f11f0e5ecb644ed"/>
-    <p:sldId xmlns:r="http://schemas.openxmlformats.org/officeDocument/2006/relationships" id="259" r:id="R85a4750e7286480f"/>
-    <p:sldId xmlns:r="http://schemas.openxmlformats.org/officeDocument/2006/relationships" id="260" r:id="R94780b100bac4815"/>
-    <p:sldId xmlns:r="http://schemas.openxmlformats.org/officeDocument/2006/relationships" id="261" r:id="Rd9e9434d40504710"/>
-    <p:sldId xmlns:r="http://schemas.openxmlformats.org/officeDocument/2006/relationships" id="262" r:id="R21105031ba9d48b7"/>
-    <p:sldId xmlns:r="http://schemas.openxmlformats.org/officeDocument/2006/relationships" id="263" r:id="Rd832aae2b54f41ef"/>
-    <p:sldId xmlns:r="http://schemas.openxmlformats.org/officeDocument/2006/relationships" id="264" r:id="R00cb5cceb1744cff"/>
-    <p:sldId xmlns:r="http://schemas.openxmlformats.org/officeDocument/2006/relationships" id="265" r:id="R20b425520a8148e9"/>
-    <p:sldId xmlns:r="http://schemas.openxmlformats.org/officeDocument/2006/relationships" id="266" r:id="Rcedbdddd75774f96"/>
-    <p:sldId xmlns:r="http://schemas.openxmlformats.org/officeDocument/2006/relationships" id="267" r:id="R756316a1f1af41dc"/>
+    <p:sldId xmlns:r="http://schemas.openxmlformats.org/officeDocument/2006/relationships" id="256" r:id="R9387c15c3a8d46ee"/>
+    <p:sldId xmlns:r="http://schemas.openxmlformats.org/officeDocument/2006/relationships" id="257" r:id="R3799c5b8f43e480a"/>
+    <p:sldId xmlns:r="http://schemas.openxmlformats.org/officeDocument/2006/relationships" id="258" r:id="Rd5f1a021855d400c"/>
+    <p:sldId xmlns:r="http://schemas.openxmlformats.org/officeDocument/2006/relationships" id="259" r:id="Rc1591a7f15604318"/>
+    <p:sldId xmlns:r="http://schemas.openxmlformats.org/officeDocument/2006/relationships" id="260" r:id="R1a6f27b7ee1945c6"/>
+    <p:sldId xmlns:r="http://schemas.openxmlformats.org/officeDocument/2006/relationships" id="261" r:id="R5f2985eef12a45f7"/>
+    <p:sldId xmlns:r="http://schemas.openxmlformats.org/officeDocument/2006/relationships" id="262" r:id="R72cb4a67dd2d4881"/>
+    <p:sldId xmlns:r="http://schemas.openxmlformats.org/officeDocument/2006/relationships" id="263" r:id="R0fbe01a15fb24cbb"/>
+    <p:sldId xmlns:r="http://schemas.openxmlformats.org/officeDocument/2006/relationships" id="264" r:id="R645cc636472f42fe"/>
+    <p:sldId xmlns:r="http://schemas.openxmlformats.org/officeDocument/2006/relationships" id="265" r:id="R72faa42b51bc406d"/>
+    <p:sldId xmlns:r="http://schemas.openxmlformats.org/officeDocument/2006/relationships" id="266" r:id="Rea124612a5fb4c2f"/>
+    <p:sldId xmlns:r="http://schemas.openxmlformats.org/officeDocument/2006/relationships" id="267" r:id="R8451b4cd675d4c93"/>
   </p:sldIdLst>
   <p:sldSz cx="12192000" cy="6858000"/>
   <p:notesSz cx="6858000" cy="9144000"/>
@@ -873,7 +873,7 @@
           <a:lstStyle xmlns:a="http://schemas.openxmlformats.org/drawingml/2006/main"/>
           <a:p xmlns:a="http://schemas.openxmlformats.org/drawingml/2006/main">
             <a:r>
-              <a:t>I do. Reveal the question, setup and each calculation stage one click at a time. Pupils watch before copying. Model answer: 5,906,120 &lt; 5,960,102.</a:t>
+              <a:t>I do. Reveal the question, then reveal each mathematical change one click at a time. Point to the numbers and operation that changed before moving to the next line. Final answer: 5,906,120 &lt; 5,960,102.</a:t>
             </a:r>
           </a:p>
         </p:txBody>
@@ -1291,7 +1291,7 @@
   </p:cSld>
   <p:clrMap bg1="lt1" tx1="dk1" bg2="lt2" tx2="dk2" accent1="accent1" accent2="accent2" accent3="accent3" accent4="accent4" accent5="accent5" accent6="accent6" hlink="hlink" folHlink="folHlink"/>
   <p:sldLayoutIdLst>
-    <p:sldLayoutId xmlns:r="http://schemas.openxmlformats.org/officeDocument/2006/relationships" id="2147483649" r:id="R4717fc21911e44ff"/>
+    <p:sldLayoutId xmlns:r="http://schemas.openxmlformats.org/officeDocument/2006/relationships" id="2147483649" r:id="R94b596d9d8564d1e"/>
   </p:sldLayoutIdLst>
   <p:txStyles>
     <p:titleStyle>
@@ -1842,7 +1842,7 @@
           <p:cNvPr id="12" name="">
             <a:extLst xmlns:a="http://schemas.openxmlformats.org/drawingml/2006/main">
               <a:ext uri="{FF2B5EF4-FFF2-40B4-BE49-F238E27FC236}">
-                <a16:creationId xmlns:a16="http://schemas.microsoft.com/office/drawing/2014/main" id="{72E28937-7B2E-4DA1-A7D3-A5744173AB0A}"/>
+                <a16:creationId xmlns:a16="http://schemas.microsoft.com/office/drawing/2014/main" id="{96A98000-4178-4F6A-A006-D3179A9EB4D2}"/>
               </a:ext>
             </a:extLst>
           </p:cNvPr>
@@ -1874,7 +1874,7 @@
           <p:cNvPr id="2" name="">
             <a:extLst xmlns:a="http://schemas.openxmlformats.org/drawingml/2006/main">
               <a:ext uri="{FF2B5EF4-FFF2-40B4-BE49-F238E27FC236}">
-                <a16:creationId xmlns:a16="http://schemas.microsoft.com/office/drawing/2014/main" id="{AB72EDA0-F637-4F53-92D3-0EF30BEBD43F}"/>
+                <a16:creationId xmlns:a16="http://schemas.microsoft.com/office/drawing/2014/main" id="{FFBE8084-A373-4C5C-9DDE-EE01F8098954}"/>
               </a:ext>
             </a:extLst>
           </p:cNvPr>
@@ -1931,7 +1931,7 @@
           <p:cNvPr id="3" name="">
             <a:extLst xmlns:a="http://schemas.openxmlformats.org/drawingml/2006/main">
               <a:ext uri="{FF2B5EF4-FFF2-40B4-BE49-F238E27FC236}">
-                <a16:creationId xmlns:a16="http://schemas.microsoft.com/office/drawing/2014/main" id="{5D89E824-056A-4CB6-9301-A98E99F46AE4}"/>
+                <a16:creationId xmlns:a16="http://schemas.microsoft.com/office/drawing/2014/main" id="{7FF4FF22-C0FA-4F19-8519-4E83FB644CBF}"/>
               </a:ext>
             </a:extLst>
           </p:cNvPr>
@@ -1965,7 +1965,7 @@
           <p:cNvPr id="4" name="">
             <a:extLst xmlns:a="http://schemas.openxmlformats.org/drawingml/2006/main">
               <a:ext uri="{FF2B5EF4-FFF2-40B4-BE49-F238E27FC236}">
-                <a16:creationId xmlns:a16="http://schemas.microsoft.com/office/drawing/2014/main" id="{8ED3DB92-E6F0-4246-8D86-DBEC9788D7A0}"/>
+                <a16:creationId xmlns:a16="http://schemas.microsoft.com/office/drawing/2014/main" id="{A784AFE9-9EB0-4DD4-B389-47B96C590811}"/>
               </a:ext>
             </a:extLst>
           </p:cNvPr>
@@ -2022,7 +2022,7 @@
           <p:cNvPr id="5" name="">
             <a:extLst xmlns:a="http://schemas.openxmlformats.org/drawingml/2006/main">
               <a:ext uri="{FF2B5EF4-FFF2-40B4-BE49-F238E27FC236}">
-                <a16:creationId xmlns:a16="http://schemas.microsoft.com/office/drawing/2014/main" id="{2AD93285-6185-41C8-9E6E-9271784F856C}"/>
+                <a16:creationId xmlns:a16="http://schemas.microsoft.com/office/drawing/2014/main" id="{EAAF8DF9-768E-430E-9DE3-476E8FB17795}"/>
               </a:ext>
             </a:extLst>
           </p:cNvPr>
@@ -2079,7 +2079,7 @@
           <p:cNvPr id="6" name="">
             <a:extLst xmlns:a="http://schemas.openxmlformats.org/drawingml/2006/main">
               <a:ext uri="{FF2B5EF4-FFF2-40B4-BE49-F238E27FC236}">
-                <a16:creationId xmlns:a16="http://schemas.microsoft.com/office/drawing/2014/main" id="{1593392B-7CBD-490E-AE65-0AABC2693E3A}"/>
+                <a16:creationId xmlns:a16="http://schemas.microsoft.com/office/drawing/2014/main" id="{0FC88F2D-26A1-4886-B7D9-EEACEB65AE24}"/>
               </a:ext>
             </a:extLst>
           </p:cNvPr>
@@ -2113,7 +2113,7 @@
           <p:cNvPr id="7" name="">
             <a:extLst xmlns:a="http://schemas.openxmlformats.org/drawingml/2006/main">
               <a:ext uri="{FF2B5EF4-FFF2-40B4-BE49-F238E27FC236}">
-                <a16:creationId xmlns:a16="http://schemas.microsoft.com/office/drawing/2014/main" id="{0BB73A35-2C25-46CE-8C13-C489DF5DCD80}"/>
+                <a16:creationId xmlns:a16="http://schemas.microsoft.com/office/drawing/2014/main" id="{26A39295-6631-4F39-AB53-4573E11213B7}"/>
               </a:ext>
             </a:extLst>
           </p:cNvPr>
@@ -2170,7 +2170,7 @@
           <p:cNvPr id="8" name="">
             <a:extLst xmlns:a="http://schemas.openxmlformats.org/drawingml/2006/main">
               <a:ext uri="{FF2B5EF4-FFF2-40B4-BE49-F238E27FC236}">
-                <a16:creationId xmlns:a16="http://schemas.microsoft.com/office/drawing/2014/main" id="{81191C15-88F2-4550-998B-CD4F23130367}"/>
+                <a16:creationId xmlns:a16="http://schemas.microsoft.com/office/drawing/2014/main" id="{38D0BB8B-9A5A-4836-B347-BB0A401008B1}"/>
               </a:ext>
             </a:extLst>
           </p:cNvPr>
@@ -2227,7 +2227,7 @@
           <p:cNvPr id="9" name="">
             <a:extLst xmlns:a="http://schemas.openxmlformats.org/drawingml/2006/main">
               <a:ext uri="{FF2B5EF4-FFF2-40B4-BE49-F238E27FC236}">
-                <a16:creationId xmlns:a16="http://schemas.microsoft.com/office/drawing/2014/main" id="{0B1A1E3E-80BF-4342-8A8A-D8411C923A02}"/>
+                <a16:creationId xmlns:a16="http://schemas.microsoft.com/office/drawing/2014/main" id="{33E8E364-A63D-4FA1-BAD6-0A57D43DFBA1}"/>
               </a:ext>
             </a:extLst>
           </p:cNvPr>
@@ -2284,7 +2284,7 @@
           <p:cNvPr id="10" name="">
             <a:extLst xmlns:a="http://schemas.openxmlformats.org/drawingml/2006/main">
               <a:ext uri="{FF2B5EF4-FFF2-40B4-BE49-F238E27FC236}">
-                <a16:creationId xmlns:a16="http://schemas.microsoft.com/office/drawing/2014/main" id="{DD34F5A5-98D2-4F32-BF88-30F21F6B983A}"/>
+                <a16:creationId xmlns:a16="http://schemas.microsoft.com/office/drawing/2014/main" id="{1608E69A-4380-4D25-AA56-76C59F60B2F3}"/>
               </a:ext>
             </a:extLst>
           </p:cNvPr>
@@ -2341,7 +2341,7 @@
           <p:cNvPr id="11" name="">
             <a:extLst xmlns:a="http://schemas.openxmlformats.org/drawingml/2006/main">
               <a:ext uri="{FF2B5EF4-FFF2-40B4-BE49-F238E27FC236}">
-                <a16:creationId xmlns:a16="http://schemas.microsoft.com/office/drawing/2014/main" id="{01D69003-8449-4536-A2B8-8FA557DD74DE}"/>
+                <a16:creationId xmlns:a16="http://schemas.microsoft.com/office/drawing/2014/main" id="{5620EDB2-D627-494B-970A-DFD54883C042}"/>
               </a:ext>
             </a:extLst>
           </p:cNvPr>
@@ -2396,7 +2396,7 @@
     </p:spTree>
     <p:extLst>
       <p:ext uri="{BB962C8B-B14F-4D97-AF65-F5344CB8AC3E}">
-        <p14:creationId xmlns:p14="http://schemas.microsoft.com/office/powerpoint/2010/main" val="2094621067"/>
+        <p14:creationId xmlns:p14="http://schemas.microsoft.com/office/powerpoint/2010/main" val="200662266"/>
       </p:ext>
     </p:extLst>
   </p:cSld>
@@ -2427,7 +2427,7 @@
           <p:cNvPr id="14" name="">
             <a:extLst xmlns:a="http://schemas.openxmlformats.org/drawingml/2006/main">
               <a:ext uri="{FF2B5EF4-FFF2-40B4-BE49-F238E27FC236}">
-                <a16:creationId xmlns:a16="http://schemas.microsoft.com/office/drawing/2014/main" id="{55F73106-3F44-4E14-ADDF-2057B10099D7}"/>
+                <a16:creationId xmlns:a16="http://schemas.microsoft.com/office/drawing/2014/main" id="{3A020EBA-F7CC-4D48-9AA7-E0F8A6382D87}"/>
               </a:ext>
             </a:extLst>
           </p:cNvPr>
@@ -2459,7 +2459,7 @@
           <p:cNvPr id="2" name="">
             <a:extLst xmlns:a="http://schemas.openxmlformats.org/drawingml/2006/main">
               <a:ext uri="{FF2B5EF4-FFF2-40B4-BE49-F238E27FC236}">
-                <a16:creationId xmlns:a16="http://schemas.microsoft.com/office/drawing/2014/main" id="{BF30667C-9D03-402B-BB76-37F8580CDC5E}"/>
+                <a16:creationId xmlns:a16="http://schemas.microsoft.com/office/drawing/2014/main" id="{D05AEA6E-E490-491C-A2A3-39FA75190EA8}"/>
               </a:ext>
             </a:extLst>
           </p:cNvPr>
@@ -2516,7 +2516,7 @@
           <p:cNvPr id="3" name="">
             <a:extLst xmlns:a="http://schemas.openxmlformats.org/drawingml/2006/main">
               <a:ext uri="{FF2B5EF4-FFF2-40B4-BE49-F238E27FC236}">
-                <a16:creationId xmlns:a16="http://schemas.microsoft.com/office/drawing/2014/main" id="{45E3AE70-0C48-4975-89F9-350E14FB9B3A}"/>
+                <a16:creationId xmlns:a16="http://schemas.microsoft.com/office/drawing/2014/main" id="{73214B19-4B5F-470E-8C03-477A7682D870}"/>
               </a:ext>
             </a:extLst>
           </p:cNvPr>
@@ -2548,7 +2548,7 @@
           <p:cNvPr id="4" name="">
             <a:extLst xmlns:a="http://schemas.openxmlformats.org/drawingml/2006/main">
               <a:ext uri="{FF2B5EF4-FFF2-40B4-BE49-F238E27FC236}">
-                <a16:creationId xmlns:a16="http://schemas.microsoft.com/office/drawing/2014/main" id="{84015E47-274B-4D4D-B5C3-48B164A77E02}"/>
+                <a16:creationId xmlns:a16="http://schemas.microsoft.com/office/drawing/2014/main" id="{6C125DE1-FA5F-4642-B983-92B0FB9EE9DD}"/>
               </a:ext>
             </a:extLst>
           </p:cNvPr>
@@ -2605,7 +2605,7 @@
           <p:cNvPr id="5" name="">
             <a:extLst xmlns:a="http://schemas.openxmlformats.org/drawingml/2006/main">
               <a:ext uri="{FF2B5EF4-FFF2-40B4-BE49-F238E27FC236}">
-                <a16:creationId xmlns:a16="http://schemas.microsoft.com/office/drawing/2014/main" id="{EAB37C62-37C6-456C-AEE8-E9F9AF826C66}"/>
+                <a16:creationId xmlns:a16="http://schemas.microsoft.com/office/drawing/2014/main" id="{54908EC9-4F0F-4809-A5AF-C0C426E12CF7}"/>
               </a:ext>
             </a:extLst>
           </p:cNvPr>
@@ -2662,7 +2662,7 @@
           <p:cNvPr id="6" name="">
             <a:extLst xmlns:a="http://schemas.openxmlformats.org/drawingml/2006/main">
               <a:ext uri="{FF2B5EF4-FFF2-40B4-BE49-F238E27FC236}">
-                <a16:creationId xmlns:a16="http://schemas.microsoft.com/office/drawing/2014/main" id="{56701866-4B58-4072-942D-C33DBC491FFD}"/>
+                <a16:creationId xmlns:a16="http://schemas.microsoft.com/office/drawing/2014/main" id="{84D8384E-1E4B-4C49-B16B-155BED0E269D}"/>
               </a:ext>
             </a:extLst>
           </p:cNvPr>
@@ -2719,7 +2719,7 @@
           <p:cNvPr id="7" name="">
             <a:extLst xmlns:a="http://schemas.openxmlformats.org/drawingml/2006/main">
               <a:ext uri="{FF2B5EF4-FFF2-40B4-BE49-F238E27FC236}">
-                <a16:creationId xmlns:a16="http://schemas.microsoft.com/office/drawing/2014/main" id="{340B2870-3FBE-486D-BD9B-CF83E450E340}"/>
+                <a16:creationId xmlns:a16="http://schemas.microsoft.com/office/drawing/2014/main" id="{5B1365E9-5199-4C18-812A-53856CA9618A}"/>
               </a:ext>
             </a:extLst>
           </p:cNvPr>
@@ -2751,7 +2751,7 @@
           <p:cNvPr id="8" name="">
             <a:extLst xmlns:a="http://schemas.openxmlformats.org/drawingml/2006/main">
               <a:ext uri="{FF2B5EF4-FFF2-40B4-BE49-F238E27FC236}">
-                <a16:creationId xmlns:a16="http://schemas.microsoft.com/office/drawing/2014/main" id="{D6D331B8-336D-4E6B-B63D-BE091B6188EB}"/>
+                <a16:creationId xmlns:a16="http://schemas.microsoft.com/office/drawing/2014/main" id="{71CFE675-DA57-489E-AD00-5F6F306210D3}"/>
               </a:ext>
             </a:extLst>
           </p:cNvPr>
@@ -2808,7 +2808,7 @@
           <p:cNvPr id="9" name="">
             <a:extLst xmlns:a="http://schemas.openxmlformats.org/drawingml/2006/main">
               <a:ext uri="{FF2B5EF4-FFF2-40B4-BE49-F238E27FC236}">
-                <a16:creationId xmlns:a16="http://schemas.microsoft.com/office/drawing/2014/main" id="{1CB02016-F2D3-41CE-8FDF-DA798221AFFE}"/>
+                <a16:creationId xmlns:a16="http://schemas.microsoft.com/office/drawing/2014/main" id="{47045E91-5DA6-4600-B6C9-E72681AF291E}"/>
               </a:ext>
             </a:extLst>
           </p:cNvPr>
@@ -2865,7 +2865,7 @@
           <p:cNvPr id="10" name="">
             <a:extLst xmlns:a="http://schemas.openxmlformats.org/drawingml/2006/main">
               <a:ext uri="{FF2B5EF4-FFF2-40B4-BE49-F238E27FC236}">
-                <a16:creationId xmlns:a16="http://schemas.microsoft.com/office/drawing/2014/main" id="{5A7E6A47-14AB-4ACA-8622-9D59BDD2DC3B}"/>
+                <a16:creationId xmlns:a16="http://schemas.microsoft.com/office/drawing/2014/main" id="{6E2CE80B-E621-4EB3-A3D6-D780C690A6B4}"/>
               </a:ext>
             </a:extLst>
           </p:cNvPr>
@@ -2922,7 +2922,7 @@
           <p:cNvPr id="11" name="">
             <a:extLst xmlns:a="http://schemas.openxmlformats.org/drawingml/2006/main">
               <a:ext uri="{FF2B5EF4-FFF2-40B4-BE49-F238E27FC236}">
-                <a16:creationId xmlns:a16="http://schemas.microsoft.com/office/drawing/2014/main" id="{3E9C55DF-9FD9-4963-935F-1F75C1F39346}"/>
+                <a16:creationId xmlns:a16="http://schemas.microsoft.com/office/drawing/2014/main" id="{D800739E-3D92-457C-BD1E-C16AADD4DAC5}"/>
               </a:ext>
             </a:extLst>
           </p:cNvPr>
@@ -2979,7 +2979,7 @@
           <p:cNvPr id="12" name="">
             <a:extLst xmlns:a="http://schemas.openxmlformats.org/drawingml/2006/main">
               <a:ext uri="{FF2B5EF4-FFF2-40B4-BE49-F238E27FC236}">
-                <a16:creationId xmlns:a16="http://schemas.microsoft.com/office/drawing/2014/main" id="{3192CE31-5ECC-47B1-99F3-1859D2CCC547}"/>
+                <a16:creationId xmlns:a16="http://schemas.microsoft.com/office/drawing/2014/main" id="{BC79B682-0B4C-4803-A70F-FE1E10E49F16}"/>
               </a:ext>
             </a:extLst>
           </p:cNvPr>
@@ -3036,7 +3036,7 @@
           <p:cNvPr id="13" name="">
             <a:extLst xmlns:a="http://schemas.openxmlformats.org/drawingml/2006/main">
               <a:ext uri="{FF2B5EF4-FFF2-40B4-BE49-F238E27FC236}">
-                <a16:creationId xmlns:a16="http://schemas.microsoft.com/office/drawing/2014/main" id="{6A50D892-C529-44C8-9C40-9D49AB5F5233}"/>
+                <a16:creationId xmlns:a16="http://schemas.microsoft.com/office/drawing/2014/main" id="{33247A58-5924-4963-96A6-4F98EC4CD652}"/>
               </a:ext>
             </a:extLst>
           </p:cNvPr>
@@ -3091,7 +3091,7 @@
     </p:spTree>
     <p:extLst>
       <p:ext uri="{BB962C8B-B14F-4D97-AF65-F5344CB8AC3E}">
-        <p14:creationId xmlns:p14="http://schemas.microsoft.com/office/powerpoint/2010/main" val="1090171839"/>
+        <p14:creationId xmlns:p14="http://schemas.microsoft.com/office/powerpoint/2010/main" val="1465663857"/>
       </p:ext>
     </p:extLst>
   </p:cSld>
@@ -3292,7 +3292,7 @@
           <p:cNvPr id="19" name="">
             <a:extLst xmlns:a="http://schemas.openxmlformats.org/drawingml/2006/main">
               <a:ext uri="{FF2B5EF4-FFF2-40B4-BE49-F238E27FC236}">
-                <a16:creationId xmlns:a16="http://schemas.microsoft.com/office/drawing/2014/main" id="{9DBC3DA1-C44D-4E69-9C7F-E45522CA9025}"/>
+                <a16:creationId xmlns:a16="http://schemas.microsoft.com/office/drawing/2014/main" id="{C1976519-8C00-4553-B1AF-631AC6C31601}"/>
               </a:ext>
             </a:extLst>
           </p:cNvPr>
@@ -3324,7 +3324,7 @@
           <p:cNvPr id="2" name="">
             <a:extLst xmlns:a="http://schemas.openxmlformats.org/drawingml/2006/main">
               <a:ext uri="{FF2B5EF4-FFF2-40B4-BE49-F238E27FC236}">
-                <a16:creationId xmlns:a16="http://schemas.microsoft.com/office/drawing/2014/main" id="{C473669C-9CA7-4962-8091-8A2ADDFDA046}"/>
+                <a16:creationId xmlns:a16="http://schemas.microsoft.com/office/drawing/2014/main" id="{825CA80A-52B0-41F9-971E-84F83E796A8C}"/>
               </a:ext>
             </a:extLst>
           </p:cNvPr>
@@ -3381,7 +3381,7 @@
           <p:cNvPr id="3" name="">
             <a:extLst xmlns:a="http://schemas.openxmlformats.org/drawingml/2006/main">
               <a:ext uri="{FF2B5EF4-FFF2-40B4-BE49-F238E27FC236}">
-                <a16:creationId xmlns:a16="http://schemas.microsoft.com/office/drawing/2014/main" id="{186DF6C2-6808-4C64-B08F-3533A4542E08}"/>
+                <a16:creationId xmlns:a16="http://schemas.microsoft.com/office/drawing/2014/main" id="{FD4A38EF-0D91-4982-9C9B-5732DB78EC10}"/>
               </a:ext>
             </a:extLst>
           </p:cNvPr>
@@ -3413,7 +3413,7 @@
           <p:cNvPr id="4" name="">
             <a:extLst xmlns:a="http://schemas.openxmlformats.org/drawingml/2006/main">
               <a:ext uri="{FF2B5EF4-FFF2-40B4-BE49-F238E27FC236}">
-                <a16:creationId xmlns:a16="http://schemas.microsoft.com/office/drawing/2014/main" id="{11E75378-9561-4E43-9E9C-09E5BE613C48}"/>
+                <a16:creationId xmlns:a16="http://schemas.microsoft.com/office/drawing/2014/main" id="{0AFDBE97-BB98-4F85-A272-F5C3D9293D91}"/>
               </a:ext>
             </a:extLst>
           </p:cNvPr>
@@ -3470,7 +3470,7 @@
           <p:cNvPr id="5" name="">
             <a:extLst xmlns:a="http://schemas.openxmlformats.org/drawingml/2006/main">
               <a:ext uri="{FF2B5EF4-FFF2-40B4-BE49-F238E27FC236}">
-                <a16:creationId xmlns:a16="http://schemas.microsoft.com/office/drawing/2014/main" id="{E35DEC9F-063F-4004-8BAD-7C87418813CF}"/>
+                <a16:creationId xmlns:a16="http://schemas.microsoft.com/office/drawing/2014/main" id="{9BD0B835-0337-439E-9426-F49DA96289E8}"/>
               </a:ext>
             </a:extLst>
           </p:cNvPr>
@@ -3527,7 +3527,7 @@
           <p:cNvPr id="6" name="">
             <a:extLst xmlns:a="http://schemas.openxmlformats.org/drawingml/2006/main">
               <a:ext uri="{FF2B5EF4-FFF2-40B4-BE49-F238E27FC236}">
-                <a16:creationId xmlns:a16="http://schemas.microsoft.com/office/drawing/2014/main" id="{17AD3FA4-8DF2-4481-97D1-13AF28EC0BEE}"/>
+                <a16:creationId xmlns:a16="http://schemas.microsoft.com/office/drawing/2014/main" id="{321F8C19-0B66-44E9-9D44-EC70E887F801}"/>
               </a:ext>
             </a:extLst>
           </p:cNvPr>
@@ -3584,7 +3584,7 @@
           <p:cNvPr id="7" name="">
             <a:extLst xmlns:a="http://schemas.openxmlformats.org/drawingml/2006/main">
               <a:ext uri="{FF2B5EF4-FFF2-40B4-BE49-F238E27FC236}">
-                <a16:creationId xmlns:a16="http://schemas.microsoft.com/office/drawing/2014/main" id="{6F7DCA0B-0235-480E-8878-B9D3A8F8C959}"/>
+                <a16:creationId xmlns:a16="http://schemas.microsoft.com/office/drawing/2014/main" id="{B6447B1A-DABF-4156-81A5-08A97A03BD2D}"/>
               </a:ext>
             </a:extLst>
           </p:cNvPr>
@@ -3616,7 +3616,7 @@
           <p:cNvPr id="8" name="">
             <a:extLst xmlns:a="http://schemas.openxmlformats.org/drawingml/2006/main">
               <a:ext uri="{FF2B5EF4-FFF2-40B4-BE49-F238E27FC236}">
-                <a16:creationId xmlns:a16="http://schemas.microsoft.com/office/drawing/2014/main" id="{C00D6246-7C4A-4D21-9913-54071765C638}"/>
+                <a16:creationId xmlns:a16="http://schemas.microsoft.com/office/drawing/2014/main" id="{CB09F3F7-A129-4CB7-8BC0-6108910E9E43}"/>
               </a:ext>
             </a:extLst>
           </p:cNvPr>
@@ -3673,7 +3673,7 @@
           <p:cNvPr id="9" name="">
             <a:extLst xmlns:a="http://schemas.openxmlformats.org/drawingml/2006/main">
               <a:ext uri="{FF2B5EF4-FFF2-40B4-BE49-F238E27FC236}">
-                <a16:creationId xmlns:a16="http://schemas.microsoft.com/office/drawing/2014/main" id="{BF81A7D7-92CB-417F-854A-55130349DEFB}"/>
+                <a16:creationId xmlns:a16="http://schemas.microsoft.com/office/drawing/2014/main" id="{34B339A0-15DC-42DB-9CA1-4AD4E02B21E6}"/>
               </a:ext>
             </a:extLst>
           </p:cNvPr>
@@ -3730,7 +3730,7 @@
           <p:cNvPr id="10" name="">
             <a:extLst xmlns:a="http://schemas.openxmlformats.org/drawingml/2006/main">
               <a:ext uri="{FF2B5EF4-FFF2-40B4-BE49-F238E27FC236}">
-                <a16:creationId xmlns:a16="http://schemas.microsoft.com/office/drawing/2014/main" id="{A28B2B72-9344-4D8C-8584-3D3FF736D3DA}"/>
+                <a16:creationId xmlns:a16="http://schemas.microsoft.com/office/drawing/2014/main" id="{1963E6A8-06B7-4F8A-B2CE-8AE46153FABF}"/>
               </a:ext>
             </a:extLst>
           </p:cNvPr>
@@ -3787,7 +3787,7 @@
           <p:cNvPr id="11" name="">
             <a:extLst xmlns:a="http://schemas.openxmlformats.org/drawingml/2006/main">
               <a:ext uri="{FF2B5EF4-FFF2-40B4-BE49-F238E27FC236}">
-                <a16:creationId xmlns:a16="http://schemas.microsoft.com/office/drawing/2014/main" id="{C28EDC77-27D6-4407-BC1B-53DE47775BB3}"/>
+                <a16:creationId xmlns:a16="http://schemas.microsoft.com/office/drawing/2014/main" id="{2357A53E-CB69-4F54-8ACB-35494BD78490}"/>
               </a:ext>
             </a:extLst>
           </p:cNvPr>
@@ -3821,7 +3821,7 @@
           <p:cNvPr id="12" name="">
             <a:extLst xmlns:a="http://schemas.openxmlformats.org/drawingml/2006/main">
               <a:ext uri="{FF2B5EF4-FFF2-40B4-BE49-F238E27FC236}">
-                <a16:creationId xmlns:a16="http://schemas.microsoft.com/office/drawing/2014/main" id="{DC3AF12F-7EB4-4367-BB33-19AA880ED180}"/>
+                <a16:creationId xmlns:a16="http://schemas.microsoft.com/office/drawing/2014/main" id="{7840BE91-7A4A-432A-8815-7718A8E980C5}"/>
               </a:ext>
             </a:extLst>
           </p:cNvPr>
@@ -3878,7 +3878,7 @@
           <p:cNvPr id="13" name="">
             <a:extLst xmlns:a="http://schemas.openxmlformats.org/drawingml/2006/main">
               <a:ext uri="{FF2B5EF4-FFF2-40B4-BE49-F238E27FC236}">
-                <a16:creationId xmlns:a16="http://schemas.microsoft.com/office/drawing/2014/main" id="{9563198F-84BE-4C0A-9355-12E5D1551934}"/>
+                <a16:creationId xmlns:a16="http://schemas.microsoft.com/office/drawing/2014/main" id="{70C0436E-8C55-4A3E-A383-55387DEAD7EA}"/>
               </a:ext>
             </a:extLst>
           </p:cNvPr>
@@ -3935,7 +3935,7 @@
           <p:cNvPr id="14" name="">
             <a:extLst xmlns:a="http://schemas.openxmlformats.org/drawingml/2006/main">
               <a:ext uri="{FF2B5EF4-FFF2-40B4-BE49-F238E27FC236}">
-                <a16:creationId xmlns:a16="http://schemas.microsoft.com/office/drawing/2014/main" id="{A604D092-87C7-425F-B461-1C6152F4606D}"/>
+                <a16:creationId xmlns:a16="http://schemas.microsoft.com/office/drawing/2014/main" id="{7EFFE9CE-6487-49EA-B640-57FDB5172372}"/>
               </a:ext>
             </a:extLst>
           </p:cNvPr>
@@ -3992,7 +3992,7 @@
           <p:cNvPr id="15" name="">
             <a:extLst xmlns:a="http://schemas.openxmlformats.org/drawingml/2006/main">
               <a:ext uri="{FF2B5EF4-FFF2-40B4-BE49-F238E27FC236}">
-                <a16:creationId xmlns:a16="http://schemas.microsoft.com/office/drawing/2014/main" id="{A2CC1869-8ECD-4F52-9115-F2323B6D98EF}"/>
+                <a16:creationId xmlns:a16="http://schemas.microsoft.com/office/drawing/2014/main" id="{92F525D1-201A-4497-9048-85FDFAA828D9}"/>
               </a:ext>
             </a:extLst>
           </p:cNvPr>
@@ -4026,7 +4026,7 @@
           <p:cNvPr id="16" name="">
             <a:extLst xmlns:a="http://schemas.openxmlformats.org/drawingml/2006/main">
               <a:ext uri="{FF2B5EF4-FFF2-40B4-BE49-F238E27FC236}">
-                <a16:creationId xmlns:a16="http://schemas.microsoft.com/office/drawing/2014/main" id="{7E1E9977-4E14-41FA-873D-12D754D8762D}"/>
+                <a16:creationId xmlns:a16="http://schemas.microsoft.com/office/drawing/2014/main" id="{DE6F6B89-071F-4698-8597-00C32BC4BDB3}"/>
               </a:ext>
             </a:extLst>
           </p:cNvPr>
@@ -4083,7 +4083,7 @@
           <p:cNvPr id="17" name="">
             <a:extLst xmlns:a="http://schemas.openxmlformats.org/drawingml/2006/main">
               <a:ext uri="{FF2B5EF4-FFF2-40B4-BE49-F238E27FC236}">
-                <a16:creationId xmlns:a16="http://schemas.microsoft.com/office/drawing/2014/main" id="{3FC1E9F2-7FDC-4524-A58E-41B45DBA6F1A}"/>
+                <a16:creationId xmlns:a16="http://schemas.microsoft.com/office/drawing/2014/main" id="{DE2B5FE7-D5B4-4A97-87E6-43295295176E}"/>
               </a:ext>
             </a:extLst>
           </p:cNvPr>
@@ -4140,7 +4140,7 @@
           <p:cNvPr id="18" name="">
             <a:extLst xmlns:a="http://schemas.openxmlformats.org/drawingml/2006/main">
               <a:ext uri="{FF2B5EF4-FFF2-40B4-BE49-F238E27FC236}">
-                <a16:creationId xmlns:a16="http://schemas.microsoft.com/office/drawing/2014/main" id="{F125EF5E-AA02-4089-A146-EAE7EF6FB1ED}"/>
+                <a16:creationId xmlns:a16="http://schemas.microsoft.com/office/drawing/2014/main" id="{B10232AF-89E0-44D0-9EEB-CD04EC1F31D9}"/>
               </a:ext>
             </a:extLst>
           </p:cNvPr>
@@ -4195,7 +4195,7 @@
     </p:spTree>
     <p:extLst>
       <p:ext uri="{BB962C8B-B14F-4D97-AF65-F5344CB8AC3E}">
-        <p14:creationId xmlns:p14="http://schemas.microsoft.com/office/powerpoint/2010/main" val="733791024"/>
+        <p14:creationId xmlns:p14="http://schemas.microsoft.com/office/powerpoint/2010/main" val="1026772000"/>
       </p:ext>
     </p:extLst>
   </p:cSld>
@@ -4350,7 +4350,7 @@
           <p:cNvPr id="23" name="">
             <a:extLst xmlns:a="http://schemas.openxmlformats.org/drawingml/2006/main">
               <a:ext uri="{FF2B5EF4-FFF2-40B4-BE49-F238E27FC236}">
-                <a16:creationId xmlns:a16="http://schemas.microsoft.com/office/drawing/2014/main" id="{95D936F8-4D2F-4EDE-80DB-C4D8086B18F6}"/>
+                <a16:creationId xmlns:a16="http://schemas.microsoft.com/office/drawing/2014/main" id="{5DD47967-9A5A-4272-B046-6073AA1E13F9}"/>
               </a:ext>
             </a:extLst>
           </p:cNvPr>
@@ -4382,7 +4382,7 @@
           <p:cNvPr id="2" name="">
             <a:extLst xmlns:a="http://schemas.openxmlformats.org/drawingml/2006/main">
               <a:ext uri="{FF2B5EF4-FFF2-40B4-BE49-F238E27FC236}">
-                <a16:creationId xmlns:a16="http://schemas.microsoft.com/office/drawing/2014/main" id="{02279D06-C7D9-470E-BBDE-5CA5756B7B9E}"/>
+                <a16:creationId xmlns:a16="http://schemas.microsoft.com/office/drawing/2014/main" id="{C43E37E9-DAED-4230-B3F1-9068658B0FF3}"/>
               </a:ext>
             </a:extLst>
           </p:cNvPr>
@@ -4439,7 +4439,7 @@
           <p:cNvPr id="3" name="">
             <a:extLst xmlns:a="http://schemas.openxmlformats.org/drawingml/2006/main">
               <a:ext uri="{FF2B5EF4-FFF2-40B4-BE49-F238E27FC236}">
-                <a16:creationId xmlns:a16="http://schemas.microsoft.com/office/drawing/2014/main" id="{7CFEB9E8-A50C-4CE3-9AB4-C56C7D3B9427}"/>
+                <a16:creationId xmlns:a16="http://schemas.microsoft.com/office/drawing/2014/main" id="{72E04902-B2C8-4C84-8B9A-18DD732E85FC}"/>
               </a:ext>
             </a:extLst>
           </p:cNvPr>
@@ -4471,7 +4471,7 @@
           <p:cNvPr id="4" name="">
             <a:extLst xmlns:a="http://schemas.openxmlformats.org/drawingml/2006/main">
               <a:ext uri="{FF2B5EF4-FFF2-40B4-BE49-F238E27FC236}">
-                <a16:creationId xmlns:a16="http://schemas.microsoft.com/office/drawing/2014/main" id="{1A9D9FF8-A12C-4085-A095-272556B9C940}"/>
+                <a16:creationId xmlns:a16="http://schemas.microsoft.com/office/drawing/2014/main" id="{398A406A-C653-47D2-BCD8-ADCAF5A7192E}"/>
               </a:ext>
             </a:extLst>
           </p:cNvPr>
@@ -4528,7 +4528,7 @@
           <p:cNvPr id="5" name="">
             <a:extLst xmlns:a="http://schemas.openxmlformats.org/drawingml/2006/main">
               <a:ext uri="{FF2B5EF4-FFF2-40B4-BE49-F238E27FC236}">
-                <a16:creationId xmlns:a16="http://schemas.microsoft.com/office/drawing/2014/main" id="{601720B0-7999-4691-95D4-A430556D6D96}"/>
+                <a16:creationId xmlns:a16="http://schemas.microsoft.com/office/drawing/2014/main" id="{67BD0537-1EAF-4B7E-B228-2F49FE2FA3FB}"/>
               </a:ext>
             </a:extLst>
           </p:cNvPr>
@@ -4585,7 +4585,7 @@
           <p:cNvPr id="6" name="">
             <a:extLst xmlns:a="http://schemas.openxmlformats.org/drawingml/2006/main">
               <a:ext uri="{FF2B5EF4-FFF2-40B4-BE49-F238E27FC236}">
-                <a16:creationId xmlns:a16="http://schemas.microsoft.com/office/drawing/2014/main" id="{0A2676E1-4464-417E-995F-DEE7F6F86157}"/>
+                <a16:creationId xmlns:a16="http://schemas.microsoft.com/office/drawing/2014/main" id="{CF52F3D4-FB2D-46EE-9F64-0358AF919EE5}"/>
               </a:ext>
             </a:extLst>
           </p:cNvPr>
@@ -4642,7 +4642,7 @@
           <p:cNvPr id="7" name="">
             <a:extLst xmlns:a="http://schemas.openxmlformats.org/drawingml/2006/main">
               <a:ext uri="{FF2B5EF4-FFF2-40B4-BE49-F238E27FC236}">
-                <a16:creationId xmlns:a16="http://schemas.microsoft.com/office/drawing/2014/main" id="{A0D47E03-AC1A-4F5C-9B3F-52F881561232}"/>
+                <a16:creationId xmlns:a16="http://schemas.microsoft.com/office/drawing/2014/main" id="{F5C51375-2B23-446B-B402-5716173A5C70}"/>
               </a:ext>
             </a:extLst>
           </p:cNvPr>
@@ -4674,7 +4674,7 @@
           <p:cNvPr id="8" name="">
             <a:extLst xmlns:a="http://schemas.openxmlformats.org/drawingml/2006/main">
               <a:ext uri="{FF2B5EF4-FFF2-40B4-BE49-F238E27FC236}">
-                <a16:creationId xmlns:a16="http://schemas.microsoft.com/office/drawing/2014/main" id="{6D7215F2-38F3-4449-B033-5AD87CB14148}"/>
+                <a16:creationId xmlns:a16="http://schemas.microsoft.com/office/drawing/2014/main" id="{E3B204C4-C874-440D-A94B-180E7003405B}"/>
               </a:ext>
             </a:extLst>
           </p:cNvPr>
@@ -4731,7 +4731,7 @@
           <p:cNvPr id="9" name="">
             <a:extLst xmlns:a="http://schemas.openxmlformats.org/drawingml/2006/main">
               <a:ext uri="{FF2B5EF4-FFF2-40B4-BE49-F238E27FC236}">
-                <a16:creationId xmlns:a16="http://schemas.microsoft.com/office/drawing/2014/main" id="{60207859-0368-487C-BF91-75DA8B02FEC6}"/>
+                <a16:creationId xmlns:a16="http://schemas.microsoft.com/office/drawing/2014/main" id="{6632C90D-5B3E-41F5-A282-0A29425DC045}"/>
               </a:ext>
             </a:extLst>
           </p:cNvPr>
@@ -4788,7 +4788,7 @@
           <p:cNvPr id="10" name="">
             <a:extLst xmlns:a="http://schemas.openxmlformats.org/drawingml/2006/main">
               <a:ext uri="{FF2B5EF4-FFF2-40B4-BE49-F238E27FC236}">
-                <a16:creationId xmlns:a16="http://schemas.microsoft.com/office/drawing/2014/main" id="{1FF5624B-E097-41D3-8AF9-0838AFAE545C}"/>
+                <a16:creationId xmlns:a16="http://schemas.microsoft.com/office/drawing/2014/main" id="{50A77843-4454-4835-B7DC-75DB3A5EDE93}"/>
               </a:ext>
             </a:extLst>
           </p:cNvPr>
@@ -4822,7 +4822,7 @@
           <p:cNvPr id="11" name="">
             <a:extLst xmlns:a="http://schemas.openxmlformats.org/drawingml/2006/main">
               <a:ext uri="{FF2B5EF4-FFF2-40B4-BE49-F238E27FC236}">
-                <a16:creationId xmlns:a16="http://schemas.microsoft.com/office/drawing/2014/main" id="{E4AE0A31-53AB-47AB-9F74-598E2E4BB619}"/>
+                <a16:creationId xmlns:a16="http://schemas.microsoft.com/office/drawing/2014/main" id="{1CBA24DC-E8BB-4438-929B-256763F3B6FD}"/>
               </a:ext>
             </a:extLst>
           </p:cNvPr>
@@ -4854,7 +4854,7 @@
           <p:cNvPr id="12" name="">
             <a:extLst xmlns:a="http://schemas.openxmlformats.org/drawingml/2006/main">
               <a:ext uri="{FF2B5EF4-FFF2-40B4-BE49-F238E27FC236}">
-                <a16:creationId xmlns:a16="http://schemas.microsoft.com/office/drawing/2014/main" id="{03B6BA10-DA81-4769-98C8-5586504F25F4}"/>
+                <a16:creationId xmlns:a16="http://schemas.microsoft.com/office/drawing/2014/main" id="{5E0A7B4E-2D31-48EB-A007-074079422757}"/>
               </a:ext>
             </a:extLst>
           </p:cNvPr>
@@ -4911,7 +4911,7 @@
           <p:cNvPr id="13" name="">
             <a:extLst xmlns:a="http://schemas.openxmlformats.org/drawingml/2006/main">
               <a:ext uri="{FF2B5EF4-FFF2-40B4-BE49-F238E27FC236}">
-                <a16:creationId xmlns:a16="http://schemas.microsoft.com/office/drawing/2014/main" id="{E6516AD8-B0E8-4044-81F1-B6E867B2925A}"/>
+                <a16:creationId xmlns:a16="http://schemas.microsoft.com/office/drawing/2014/main" id="{0507D87F-B25B-42F5-9FB2-6F60728951CC}"/>
               </a:ext>
             </a:extLst>
           </p:cNvPr>
@@ -4968,7 +4968,7 @@
           <p:cNvPr id="14" name="">
             <a:extLst xmlns:a="http://schemas.openxmlformats.org/drawingml/2006/main">
               <a:ext uri="{FF2B5EF4-FFF2-40B4-BE49-F238E27FC236}">
-                <a16:creationId xmlns:a16="http://schemas.microsoft.com/office/drawing/2014/main" id="{2F882B7F-7A08-401E-913B-C83CD1C47A01}"/>
+                <a16:creationId xmlns:a16="http://schemas.microsoft.com/office/drawing/2014/main" id="{CEA94FFA-BC71-4EB6-B1DC-75CC0AB47910}"/>
               </a:ext>
             </a:extLst>
           </p:cNvPr>
@@ -5002,7 +5002,7 @@
           <p:cNvPr id="15" name="">
             <a:extLst xmlns:a="http://schemas.openxmlformats.org/drawingml/2006/main">
               <a:ext uri="{FF2B5EF4-FFF2-40B4-BE49-F238E27FC236}">
-                <a16:creationId xmlns:a16="http://schemas.microsoft.com/office/drawing/2014/main" id="{3D12177B-C306-4FE0-B1D1-DAFA407B55A8}"/>
+                <a16:creationId xmlns:a16="http://schemas.microsoft.com/office/drawing/2014/main" id="{4C70DDF8-EAA0-46F3-9250-68E5FF1A8DA4}"/>
               </a:ext>
             </a:extLst>
           </p:cNvPr>
@@ -5034,7 +5034,7 @@
           <p:cNvPr id="16" name="">
             <a:extLst xmlns:a="http://schemas.openxmlformats.org/drawingml/2006/main">
               <a:ext uri="{FF2B5EF4-FFF2-40B4-BE49-F238E27FC236}">
-                <a16:creationId xmlns:a16="http://schemas.microsoft.com/office/drawing/2014/main" id="{01D4892A-EBED-4250-8D5E-EB1FF1C7A4F7}"/>
+                <a16:creationId xmlns:a16="http://schemas.microsoft.com/office/drawing/2014/main" id="{CA9C5FBD-693B-4964-9F76-A02A8DD4E7E5}"/>
               </a:ext>
             </a:extLst>
           </p:cNvPr>
@@ -5091,7 +5091,7 @@
           <p:cNvPr id="17" name="">
             <a:extLst xmlns:a="http://schemas.openxmlformats.org/drawingml/2006/main">
               <a:ext uri="{FF2B5EF4-FFF2-40B4-BE49-F238E27FC236}">
-                <a16:creationId xmlns:a16="http://schemas.microsoft.com/office/drawing/2014/main" id="{6CE25E2B-0E51-4FC4-AE82-2722B88C3D97}"/>
+                <a16:creationId xmlns:a16="http://schemas.microsoft.com/office/drawing/2014/main" id="{61355D8B-9CEE-4B80-B37D-E38EAEFAB543}"/>
               </a:ext>
             </a:extLst>
           </p:cNvPr>
@@ -5148,7 +5148,7 @@
           <p:cNvPr id="18" name="">
             <a:extLst xmlns:a="http://schemas.openxmlformats.org/drawingml/2006/main">
               <a:ext uri="{FF2B5EF4-FFF2-40B4-BE49-F238E27FC236}">
-                <a16:creationId xmlns:a16="http://schemas.microsoft.com/office/drawing/2014/main" id="{FFABD39D-0BF9-4AC8-AA4B-A03FBCA5FC48}"/>
+                <a16:creationId xmlns:a16="http://schemas.microsoft.com/office/drawing/2014/main" id="{8FBE619A-4575-4992-9582-C85251918993}"/>
               </a:ext>
             </a:extLst>
           </p:cNvPr>
@@ -5182,7 +5182,7 @@
           <p:cNvPr id="19" name="">
             <a:extLst xmlns:a="http://schemas.openxmlformats.org/drawingml/2006/main">
               <a:ext uri="{FF2B5EF4-FFF2-40B4-BE49-F238E27FC236}">
-                <a16:creationId xmlns:a16="http://schemas.microsoft.com/office/drawing/2014/main" id="{73EDE7CB-6A5D-448B-BCF3-E57D2DE8F9AA}"/>
+                <a16:creationId xmlns:a16="http://schemas.microsoft.com/office/drawing/2014/main" id="{4797A278-A99B-4BA3-8B96-9671CF93F1C1}"/>
               </a:ext>
             </a:extLst>
           </p:cNvPr>
@@ -5214,7 +5214,7 @@
           <p:cNvPr id="20" name="">
             <a:extLst xmlns:a="http://schemas.openxmlformats.org/drawingml/2006/main">
               <a:ext uri="{FF2B5EF4-FFF2-40B4-BE49-F238E27FC236}">
-                <a16:creationId xmlns:a16="http://schemas.microsoft.com/office/drawing/2014/main" id="{37B30200-12C9-4772-9A0C-3CFBB25C2D15}"/>
+                <a16:creationId xmlns:a16="http://schemas.microsoft.com/office/drawing/2014/main" id="{614ABE04-64C2-4353-9C4D-196629F79BB5}"/>
               </a:ext>
             </a:extLst>
           </p:cNvPr>
@@ -5271,7 +5271,7 @@
           <p:cNvPr id="21" name="">
             <a:extLst xmlns:a="http://schemas.openxmlformats.org/drawingml/2006/main">
               <a:ext uri="{FF2B5EF4-FFF2-40B4-BE49-F238E27FC236}">
-                <a16:creationId xmlns:a16="http://schemas.microsoft.com/office/drawing/2014/main" id="{A40F6944-A74A-4224-B6E3-6C06B68CDC1D}"/>
+                <a16:creationId xmlns:a16="http://schemas.microsoft.com/office/drawing/2014/main" id="{FA89DC19-2257-4176-8E5A-91932180870E}"/>
               </a:ext>
             </a:extLst>
           </p:cNvPr>
@@ -5328,7 +5328,7 @@
           <p:cNvPr id="22" name="">
             <a:extLst xmlns:a="http://schemas.openxmlformats.org/drawingml/2006/main">
               <a:ext uri="{FF2B5EF4-FFF2-40B4-BE49-F238E27FC236}">
-                <a16:creationId xmlns:a16="http://schemas.microsoft.com/office/drawing/2014/main" id="{EDA3D1BF-D890-4692-80A1-54770D7B175E}"/>
+                <a16:creationId xmlns:a16="http://schemas.microsoft.com/office/drawing/2014/main" id="{E6549FAE-380A-48DF-A97A-4E97F34796C2}"/>
               </a:ext>
             </a:extLst>
           </p:cNvPr>
@@ -5383,7 +5383,7 @@
     </p:spTree>
     <p:extLst>
       <p:ext uri="{BB962C8B-B14F-4D97-AF65-F5344CB8AC3E}">
-        <p14:creationId xmlns:p14="http://schemas.microsoft.com/office/powerpoint/2010/main" val="1062695847"/>
+        <p14:creationId xmlns:p14="http://schemas.microsoft.com/office/powerpoint/2010/main" val="1366629749"/>
       </p:ext>
     </p:extLst>
   </p:cSld>
@@ -5584,7 +5584,7 @@
           <p:cNvPr id="23" name="">
             <a:extLst xmlns:a="http://schemas.openxmlformats.org/drawingml/2006/main">
               <a:ext uri="{FF2B5EF4-FFF2-40B4-BE49-F238E27FC236}">
-                <a16:creationId xmlns:a16="http://schemas.microsoft.com/office/drawing/2014/main" id="{A4AC790F-32CC-4524-9173-994BA5FC1EAA}"/>
+                <a16:creationId xmlns:a16="http://schemas.microsoft.com/office/drawing/2014/main" id="{D8478BA1-41A0-498F-8DF3-88936BA70763}"/>
               </a:ext>
             </a:extLst>
           </p:cNvPr>
@@ -5616,7 +5616,7 @@
           <p:cNvPr id="2" name="">
             <a:extLst xmlns:a="http://schemas.openxmlformats.org/drawingml/2006/main">
               <a:ext uri="{FF2B5EF4-FFF2-40B4-BE49-F238E27FC236}">
-                <a16:creationId xmlns:a16="http://schemas.microsoft.com/office/drawing/2014/main" id="{315DD31E-1616-46DF-BBB2-CF4A3AA062F4}"/>
+                <a16:creationId xmlns:a16="http://schemas.microsoft.com/office/drawing/2014/main" id="{FEC25827-A3A3-4D31-A65C-27D6DB446A92}"/>
               </a:ext>
             </a:extLst>
           </p:cNvPr>
@@ -5673,7 +5673,7 @@
           <p:cNvPr id="3" name="">
             <a:extLst xmlns:a="http://schemas.openxmlformats.org/drawingml/2006/main">
               <a:ext uri="{FF2B5EF4-FFF2-40B4-BE49-F238E27FC236}">
-                <a16:creationId xmlns:a16="http://schemas.microsoft.com/office/drawing/2014/main" id="{83D9283D-7369-45B6-8335-325747DDC6B1}"/>
+                <a16:creationId xmlns:a16="http://schemas.microsoft.com/office/drawing/2014/main" id="{E5D9D347-D8F0-4693-83C3-C0931BBE8518}"/>
               </a:ext>
             </a:extLst>
           </p:cNvPr>
@@ -5705,7 +5705,7 @@
           <p:cNvPr id="4" name="">
             <a:extLst xmlns:a="http://schemas.openxmlformats.org/drawingml/2006/main">
               <a:ext uri="{FF2B5EF4-FFF2-40B4-BE49-F238E27FC236}">
-                <a16:creationId xmlns:a16="http://schemas.microsoft.com/office/drawing/2014/main" id="{037143AE-25C5-4842-9EDE-D8D01BAC38A9}"/>
+                <a16:creationId xmlns:a16="http://schemas.microsoft.com/office/drawing/2014/main" id="{753717A4-339C-4A52-9771-F275B630F6F9}"/>
               </a:ext>
             </a:extLst>
           </p:cNvPr>
@@ -5762,7 +5762,7 @@
           <p:cNvPr id="5" name="">
             <a:extLst xmlns:a="http://schemas.openxmlformats.org/drawingml/2006/main">
               <a:ext uri="{FF2B5EF4-FFF2-40B4-BE49-F238E27FC236}">
-                <a16:creationId xmlns:a16="http://schemas.microsoft.com/office/drawing/2014/main" id="{DDE977B1-14DA-4CE7-8F63-67670C70A493}"/>
+                <a16:creationId xmlns:a16="http://schemas.microsoft.com/office/drawing/2014/main" id="{742C533A-7890-4A5B-B680-21C9BE91589D}"/>
               </a:ext>
             </a:extLst>
           </p:cNvPr>
@@ -5819,7 +5819,7 @@
           <p:cNvPr id="6" name="">
             <a:extLst xmlns:a="http://schemas.openxmlformats.org/drawingml/2006/main">
               <a:ext uri="{FF2B5EF4-FFF2-40B4-BE49-F238E27FC236}">
-                <a16:creationId xmlns:a16="http://schemas.microsoft.com/office/drawing/2014/main" id="{4FABC750-7966-46B8-BD1B-F1AE72EB9AA5}"/>
+                <a16:creationId xmlns:a16="http://schemas.microsoft.com/office/drawing/2014/main" id="{CDE0D440-EA9D-463F-B9C7-92EB8E14980F}"/>
               </a:ext>
             </a:extLst>
           </p:cNvPr>
@@ -5876,7 +5876,7 @@
           <p:cNvPr id="7" name="">
             <a:extLst xmlns:a="http://schemas.openxmlformats.org/drawingml/2006/main">
               <a:ext uri="{FF2B5EF4-FFF2-40B4-BE49-F238E27FC236}">
-                <a16:creationId xmlns:a16="http://schemas.microsoft.com/office/drawing/2014/main" id="{590D610C-44AE-47F8-A012-EC437B9FB726}"/>
+                <a16:creationId xmlns:a16="http://schemas.microsoft.com/office/drawing/2014/main" id="{6F1CF1AD-0FE4-4BEC-A2DB-019366839E98}"/>
               </a:ext>
             </a:extLst>
           </p:cNvPr>
@@ -5908,7 +5908,7 @@
           <p:cNvPr id="8" name="">
             <a:extLst xmlns:a="http://schemas.openxmlformats.org/drawingml/2006/main">
               <a:ext uri="{FF2B5EF4-FFF2-40B4-BE49-F238E27FC236}">
-                <a16:creationId xmlns:a16="http://schemas.microsoft.com/office/drawing/2014/main" id="{9F96DBD3-F474-4146-96CA-449170FF683C}"/>
+                <a16:creationId xmlns:a16="http://schemas.microsoft.com/office/drawing/2014/main" id="{570AD0E9-21C9-42C8-B642-9130A716FE6F}"/>
               </a:ext>
             </a:extLst>
           </p:cNvPr>
@@ -5965,7 +5965,7 @@
           <p:cNvPr id="9" name="">
             <a:extLst xmlns:a="http://schemas.openxmlformats.org/drawingml/2006/main">
               <a:ext uri="{FF2B5EF4-FFF2-40B4-BE49-F238E27FC236}">
-                <a16:creationId xmlns:a16="http://schemas.microsoft.com/office/drawing/2014/main" id="{ADE698CC-EE38-407F-BE11-71919C724BB0}"/>
+                <a16:creationId xmlns:a16="http://schemas.microsoft.com/office/drawing/2014/main" id="{C38D7EA9-5EB2-41DE-A9DC-529F67F31F1C}"/>
               </a:ext>
             </a:extLst>
           </p:cNvPr>
@@ -6022,7 +6022,7 @@
           <p:cNvPr id="10" name="">
             <a:extLst xmlns:a="http://schemas.openxmlformats.org/drawingml/2006/main">
               <a:ext uri="{FF2B5EF4-FFF2-40B4-BE49-F238E27FC236}">
-                <a16:creationId xmlns:a16="http://schemas.microsoft.com/office/drawing/2014/main" id="{BFE25131-9734-45BC-B7DB-AD3A10395184}"/>
+                <a16:creationId xmlns:a16="http://schemas.microsoft.com/office/drawing/2014/main" id="{79FC714E-526F-4BAA-B1A0-BC9FC5142AA3}"/>
               </a:ext>
             </a:extLst>
           </p:cNvPr>
@@ -6056,7 +6056,7 @@
           <p:cNvPr id="11" name="">
             <a:extLst xmlns:a="http://schemas.openxmlformats.org/drawingml/2006/main">
               <a:ext uri="{FF2B5EF4-FFF2-40B4-BE49-F238E27FC236}">
-                <a16:creationId xmlns:a16="http://schemas.microsoft.com/office/drawing/2014/main" id="{7424F743-BD9B-4D8B-B1D1-4176EB803C85}"/>
+                <a16:creationId xmlns:a16="http://schemas.microsoft.com/office/drawing/2014/main" id="{4711F985-F09C-4674-95BE-10A7B729A0F6}"/>
               </a:ext>
             </a:extLst>
           </p:cNvPr>
@@ -6088,7 +6088,7 @@
           <p:cNvPr id="12" name="">
             <a:extLst xmlns:a="http://schemas.openxmlformats.org/drawingml/2006/main">
               <a:ext uri="{FF2B5EF4-FFF2-40B4-BE49-F238E27FC236}">
-                <a16:creationId xmlns:a16="http://schemas.microsoft.com/office/drawing/2014/main" id="{A0746F70-2B6E-465E-9140-F230DEF7F088}"/>
+                <a16:creationId xmlns:a16="http://schemas.microsoft.com/office/drawing/2014/main" id="{384BF5FD-EF37-4E23-9AEC-D8A3CC61BBA5}"/>
               </a:ext>
             </a:extLst>
           </p:cNvPr>
@@ -6145,7 +6145,7 @@
           <p:cNvPr id="13" name="">
             <a:extLst xmlns:a="http://schemas.openxmlformats.org/drawingml/2006/main">
               <a:ext uri="{FF2B5EF4-FFF2-40B4-BE49-F238E27FC236}">
-                <a16:creationId xmlns:a16="http://schemas.microsoft.com/office/drawing/2014/main" id="{4299D5F5-261C-462C-AADE-5F0BE29F91DD}"/>
+                <a16:creationId xmlns:a16="http://schemas.microsoft.com/office/drawing/2014/main" id="{45C13E5A-C7DE-4783-8450-156909578059}"/>
               </a:ext>
             </a:extLst>
           </p:cNvPr>
@@ -6202,7 +6202,7 @@
           <p:cNvPr id="14" name="">
             <a:extLst xmlns:a="http://schemas.openxmlformats.org/drawingml/2006/main">
               <a:ext uri="{FF2B5EF4-FFF2-40B4-BE49-F238E27FC236}">
-                <a16:creationId xmlns:a16="http://schemas.microsoft.com/office/drawing/2014/main" id="{C557E705-7963-4366-BDCB-8C1BBE2A0439}"/>
+                <a16:creationId xmlns:a16="http://schemas.microsoft.com/office/drawing/2014/main" id="{E9FFE541-B59C-4922-AA6B-E2067A1C36B9}"/>
               </a:ext>
             </a:extLst>
           </p:cNvPr>
@@ -6236,7 +6236,7 @@
           <p:cNvPr id="15" name="">
             <a:extLst xmlns:a="http://schemas.openxmlformats.org/drawingml/2006/main">
               <a:ext uri="{FF2B5EF4-FFF2-40B4-BE49-F238E27FC236}">
-                <a16:creationId xmlns:a16="http://schemas.microsoft.com/office/drawing/2014/main" id="{F496E7CE-B366-4378-AAD8-39A5188DDE4E}"/>
+                <a16:creationId xmlns:a16="http://schemas.microsoft.com/office/drawing/2014/main" id="{52CA61C7-AA3C-46FC-A762-79A825A6B976}"/>
               </a:ext>
             </a:extLst>
           </p:cNvPr>
@@ -6268,7 +6268,7 @@
           <p:cNvPr id="16" name="">
             <a:extLst xmlns:a="http://schemas.openxmlformats.org/drawingml/2006/main">
               <a:ext uri="{FF2B5EF4-FFF2-40B4-BE49-F238E27FC236}">
-                <a16:creationId xmlns:a16="http://schemas.microsoft.com/office/drawing/2014/main" id="{C976EACB-AD8A-47E2-AA3F-30BD258C234E}"/>
+                <a16:creationId xmlns:a16="http://schemas.microsoft.com/office/drawing/2014/main" id="{A09D91BD-5163-45A1-8868-E19431DCBB03}"/>
               </a:ext>
             </a:extLst>
           </p:cNvPr>
@@ -6325,7 +6325,7 @@
           <p:cNvPr id="17" name="">
             <a:extLst xmlns:a="http://schemas.openxmlformats.org/drawingml/2006/main">
               <a:ext uri="{FF2B5EF4-FFF2-40B4-BE49-F238E27FC236}">
-                <a16:creationId xmlns:a16="http://schemas.microsoft.com/office/drawing/2014/main" id="{F16C3215-ED1E-4633-B584-1001B18FB4F4}"/>
+                <a16:creationId xmlns:a16="http://schemas.microsoft.com/office/drawing/2014/main" id="{CAA330D1-CE48-413B-A971-E9238455DBE2}"/>
               </a:ext>
             </a:extLst>
           </p:cNvPr>
@@ -6382,7 +6382,7 @@
           <p:cNvPr id="18" name="">
             <a:extLst xmlns:a="http://schemas.openxmlformats.org/drawingml/2006/main">
               <a:ext uri="{FF2B5EF4-FFF2-40B4-BE49-F238E27FC236}">
-                <a16:creationId xmlns:a16="http://schemas.microsoft.com/office/drawing/2014/main" id="{095A676C-DCC7-4365-99EC-7605053EDCAA}"/>
+                <a16:creationId xmlns:a16="http://schemas.microsoft.com/office/drawing/2014/main" id="{9615A1DB-BD2B-4B40-846A-CC354814600C}"/>
               </a:ext>
             </a:extLst>
           </p:cNvPr>
@@ -6416,7 +6416,7 @@
           <p:cNvPr id="19" name="">
             <a:extLst xmlns:a="http://schemas.openxmlformats.org/drawingml/2006/main">
               <a:ext uri="{FF2B5EF4-FFF2-40B4-BE49-F238E27FC236}">
-                <a16:creationId xmlns:a16="http://schemas.microsoft.com/office/drawing/2014/main" id="{BCE7FEDC-0D5F-4FCC-B4E2-3F49C7E6E091}"/>
+                <a16:creationId xmlns:a16="http://schemas.microsoft.com/office/drawing/2014/main" id="{13F62286-AA5B-4491-B019-0E415FEA7628}"/>
               </a:ext>
             </a:extLst>
           </p:cNvPr>
@@ -6448,7 +6448,7 @@
           <p:cNvPr id="20" name="">
             <a:extLst xmlns:a="http://schemas.openxmlformats.org/drawingml/2006/main">
               <a:ext uri="{FF2B5EF4-FFF2-40B4-BE49-F238E27FC236}">
-                <a16:creationId xmlns:a16="http://schemas.microsoft.com/office/drawing/2014/main" id="{B35A79A6-99A4-4245-947A-A4006358BF03}"/>
+                <a16:creationId xmlns:a16="http://schemas.microsoft.com/office/drawing/2014/main" id="{9AB1A8E3-DB14-4C2F-B58B-D383B6411158}"/>
               </a:ext>
             </a:extLst>
           </p:cNvPr>
@@ -6505,7 +6505,7 @@
           <p:cNvPr id="21" name="">
             <a:extLst xmlns:a="http://schemas.openxmlformats.org/drawingml/2006/main">
               <a:ext uri="{FF2B5EF4-FFF2-40B4-BE49-F238E27FC236}">
-                <a16:creationId xmlns:a16="http://schemas.microsoft.com/office/drawing/2014/main" id="{6803FDDE-3884-4B55-BF64-5029A61D144E}"/>
+                <a16:creationId xmlns:a16="http://schemas.microsoft.com/office/drawing/2014/main" id="{013F141A-D142-46C4-9B49-5898E9E0154B}"/>
               </a:ext>
             </a:extLst>
           </p:cNvPr>
@@ -6562,7 +6562,7 @@
           <p:cNvPr id="22" name="">
             <a:extLst xmlns:a="http://schemas.openxmlformats.org/drawingml/2006/main">
               <a:ext uri="{FF2B5EF4-FFF2-40B4-BE49-F238E27FC236}">
-                <a16:creationId xmlns:a16="http://schemas.microsoft.com/office/drawing/2014/main" id="{DF9739DC-2DE2-4FE3-A8A1-05FA6A87F977}"/>
+                <a16:creationId xmlns:a16="http://schemas.microsoft.com/office/drawing/2014/main" id="{FF7FDA4F-939A-416F-99B1-6983FB48999C}"/>
               </a:ext>
             </a:extLst>
           </p:cNvPr>
@@ -6617,7 +6617,7 @@
     </p:spTree>
     <p:extLst>
       <p:ext uri="{BB962C8B-B14F-4D97-AF65-F5344CB8AC3E}">
-        <p14:creationId xmlns:p14="http://schemas.microsoft.com/office/powerpoint/2010/main" val="869974512"/>
+        <p14:creationId xmlns:p14="http://schemas.microsoft.com/office/powerpoint/2010/main" val="1624829698"/>
       </p:ext>
     </p:extLst>
   </p:cSld>
@@ -6818,7 +6818,7 @@
           <p:cNvPr id="16" name="">
             <a:extLst xmlns:a="http://schemas.openxmlformats.org/drawingml/2006/main">
               <a:ext uri="{FF2B5EF4-FFF2-40B4-BE49-F238E27FC236}">
-                <a16:creationId xmlns:a16="http://schemas.microsoft.com/office/drawing/2014/main" id="{8E6FAE57-457F-4F34-9B70-1EED1180309F}"/>
+                <a16:creationId xmlns:a16="http://schemas.microsoft.com/office/drawing/2014/main" id="{4782A346-9A68-43FF-8424-029417EB1C86}"/>
               </a:ext>
             </a:extLst>
           </p:cNvPr>
@@ -6850,7 +6850,7 @@
           <p:cNvPr id="2" name="">
             <a:extLst xmlns:a="http://schemas.openxmlformats.org/drawingml/2006/main">
               <a:ext uri="{FF2B5EF4-FFF2-40B4-BE49-F238E27FC236}">
-                <a16:creationId xmlns:a16="http://schemas.microsoft.com/office/drawing/2014/main" id="{62EE6412-B877-400F-85E8-C36BC164E336}"/>
+                <a16:creationId xmlns:a16="http://schemas.microsoft.com/office/drawing/2014/main" id="{7005BAF3-026D-4DB0-87DB-1E164E318F5F}"/>
               </a:ext>
             </a:extLst>
           </p:cNvPr>
@@ -6907,7 +6907,7 @@
           <p:cNvPr id="3" name="">
             <a:extLst xmlns:a="http://schemas.openxmlformats.org/drawingml/2006/main">
               <a:ext uri="{FF2B5EF4-FFF2-40B4-BE49-F238E27FC236}">
-                <a16:creationId xmlns:a16="http://schemas.microsoft.com/office/drawing/2014/main" id="{3EE7B252-0F5B-427D-8AC4-395BD43CAB8D}"/>
+                <a16:creationId xmlns:a16="http://schemas.microsoft.com/office/drawing/2014/main" id="{6920735E-0C29-4746-8746-CCC31B95A38E}"/>
               </a:ext>
             </a:extLst>
           </p:cNvPr>
@@ -6939,7 +6939,7 @@
           <p:cNvPr id="4" name="">
             <a:extLst xmlns:a="http://schemas.openxmlformats.org/drawingml/2006/main">
               <a:ext uri="{FF2B5EF4-FFF2-40B4-BE49-F238E27FC236}">
-                <a16:creationId xmlns:a16="http://schemas.microsoft.com/office/drawing/2014/main" id="{9BB9F12E-B18F-4AE7-8EFB-696B52C71115}"/>
+                <a16:creationId xmlns:a16="http://schemas.microsoft.com/office/drawing/2014/main" id="{FAA06319-456C-41EF-A565-A2214A00629F}"/>
               </a:ext>
             </a:extLst>
           </p:cNvPr>
@@ -6996,7 +6996,7 @@
           <p:cNvPr id="5" name="">
             <a:extLst xmlns:a="http://schemas.openxmlformats.org/drawingml/2006/main">
               <a:ext uri="{FF2B5EF4-FFF2-40B4-BE49-F238E27FC236}">
-                <a16:creationId xmlns:a16="http://schemas.microsoft.com/office/drawing/2014/main" id="{5E805353-32D1-4064-A318-AD6763341D8A}"/>
+                <a16:creationId xmlns:a16="http://schemas.microsoft.com/office/drawing/2014/main" id="{8991255B-CD1D-4D7E-8F6D-2E0BDD73D897}"/>
               </a:ext>
             </a:extLst>
           </p:cNvPr>
@@ -7053,7 +7053,7 @@
           <p:cNvPr id="6" name="">
             <a:extLst xmlns:a="http://schemas.openxmlformats.org/drawingml/2006/main">
               <a:ext uri="{FF2B5EF4-FFF2-40B4-BE49-F238E27FC236}">
-                <a16:creationId xmlns:a16="http://schemas.microsoft.com/office/drawing/2014/main" id="{3C8CC339-25AF-47C8-92A9-9455A151EC1B}"/>
+                <a16:creationId xmlns:a16="http://schemas.microsoft.com/office/drawing/2014/main" id="{F7BCC8DC-191A-495A-B9BF-B4FBA903A822}"/>
               </a:ext>
             </a:extLst>
           </p:cNvPr>
@@ -7110,7 +7110,7 @@
           <p:cNvPr id="7" name="">
             <a:extLst xmlns:a="http://schemas.openxmlformats.org/drawingml/2006/main">
               <a:ext uri="{FF2B5EF4-FFF2-40B4-BE49-F238E27FC236}">
-                <a16:creationId xmlns:a16="http://schemas.microsoft.com/office/drawing/2014/main" id="{FCBF04B5-7A3D-42B6-BF65-91E662AA3BB7}"/>
+                <a16:creationId xmlns:a16="http://schemas.microsoft.com/office/drawing/2014/main" id="{1A2FB631-35BF-483E-A69D-FA867B87BA37}"/>
               </a:ext>
             </a:extLst>
           </p:cNvPr>
@@ -7142,7 +7142,7 @@
           <p:cNvPr id="8" name="">
             <a:extLst xmlns:a="http://schemas.openxmlformats.org/drawingml/2006/main">
               <a:ext uri="{FF2B5EF4-FFF2-40B4-BE49-F238E27FC236}">
-                <a16:creationId xmlns:a16="http://schemas.microsoft.com/office/drawing/2014/main" id="{989E5F8F-C2E9-4D48-AC91-86DA79988547}"/>
+                <a16:creationId xmlns:a16="http://schemas.microsoft.com/office/drawing/2014/main" id="{201FB98A-3D31-480E-ABA6-DDCBC0A93250}"/>
               </a:ext>
             </a:extLst>
           </p:cNvPr>
@@ -7199,7 +7199,7 @@
           <p:cNvPr id="9" name="">
             <a:extLst xmlns:a="http://schemas.openxmlformats.org/drawingml/2006/main">
               <a:ext uri="{FF2B5EF4-FFF2-40B4-BE49-F238E27FC236}">
-                <a16:creationId xmlns:a16="http://schemas.microsoft.com/office/drawing/2014/main" id="{55789AA3-280C-4010-B18A-254F35A88C70}"/>
+                <a16:creationId xmlns:a16="http://schemas.microsoft.com/office/drawing/2014/main" id="{574A7C17-6532-48FD-A37B-70CE69D012E0}"/>
               </a:ext>
             </a:extLst>
           </p:cNvPr>
@@ -7256,7 +7256,7 @@
           <p:cNvPr id="10" name="">
             <a:extLst xmlns:a="http://schemas.openxmlformats.org/drawingml/2006/main">
               <a:ext uri="{FF2B5EF4-FFF2-40B4-BE49-F238E27FC236}">
-                <a16:creationId xmlns:a16="http://schemas.microsoft.com/office/drawing/2014/main" id="{56F67CF3-7761-4453-B5A6-B6B66B1199D1}"/>
+                <a16:creationId xmlns:a16="http://schemas.microsoft.com/office/drawing/2014/main" id="{0C5D5282-F9E1-4D22-98CF-43CF80697BB5}"/>
               </a:ext>
             </a:extLst>
           </p:cNvPr>
@@ -7313,7 +7313,7 @@
           <p:cNvPr id="11" name="">
             <a:extLst xmlns:a="http://schemas.openxmlformats.org/drawingml/2006/main">
               <a:ext uri="{FF2B5EF4-FFF2-40B4-BE49-F238E27FC236}">
-                <a16:creationId xmlns:a16="http://schemas.microsoft.com/office/drawing/2014/main" id="{CDA9B790-2914-42B4-90DD-44535F5FA998}"/>
+                <a16:creationId xmlns:a16="http://schemas.microsoft.com/office/drawing/2014/main" id="{2A952A83-BA34-4510-8700-3D480D6C110D}"/>
               </a:ext>
             </a:extLst>
           </p:cNvPr>
@@ -7345,7 +7345,7 @@
           <p:cNvPr id="12" name="">
             <a:extLst xmlns:a="http://schemas.openxmlformats.org/drawingml/2006/main">
               <a:ext uri="{FF2B5EF4-FFF2-40B4-BE49-F238E27FC236}">
-                <a16:creationId xmlns:a16="http://schemas.microsoft.com/office/drawing/2014/main" id="{C5D4162C-8436-4137-B237-BF0F90607432}"/>
+                <a16:creationId xmlns:a16="http://schemas.microsoft.com/office/drawing/2014/main" id="{37C6306D-FEDE-427E-B3F0-62B91F274157}"/>
               </a:ext>
             </a:extLst>
           </p:cNvPr>
@@ -7402,7 +7402,7 @@
           <p:cNvPr id="13" name="">
             <a:extLst xmlns:a="http://schemas.openxmlformats.org/drawingml/2006/main">
               <a:ext uri="{FF2B5EF4-FFF2-40B4-BE49-F238E27FC236}">
-                <a16:creationId xmlns:a16="http://schemas.microsoft.com/office/drawing/2014/main" id="{B2B13399-EBAD-4C88-A5C4-534FFDC2F266}"/>
+                <a16:creationId xmlns:a16="http://schemas.microsoft.com/office/drawing/2014/main" id="{57BA750A-38CE-4A0A-A1DA-CC54B3F06162}"/>
               </a:ext>
             </a:extLst>
           </p:cNvPr>
@@ -7459,7 +7459,7 @@
           <p:cNvPr id="14" name="">
             <a:extLst xmlns:a="http://schemas.openxmlformats.org/drawingml/2006/main">
               <a:ext uri="{FF2B5EF4-FFF2-40B4-BE49-F238E27FC236}">
-                <a16:creationId xmlns:a16="http://schemas.microsoft.com/office/drawing/2014/main" id="{1EC5A9F6-7369-4B43-B95B-B93A3386A661}"/>
+                <a16:creationId xmlns:a16="http://schemas.microsoft.com/office/drawing/2014/main" id="{62E77FEE-6B03-4870-B983-D2E9509F685B}"/>
               </a:ext>
             </a:extLst>
           </p:cNvPr>
@@ -7516,7 +7516,7 @@
           <p:cNvPr id="15" name="">
             <a:extLst xmlns:a="http://schemas.openxmlformats.org/drawingml/2006/main">
               <a:ext uri="{FF2B5EF4-FFF2-40B4-BE49-F238E27FC236}">
-                <a16:creationId xmlns:a16="http://schemas.microsoft.com/office/drawing/2014/main" id="{FB06F6A0-6408-47AE-8849-9205C8A4367E}"/>
+                <a16:creationId xmlns:a16="http://schemas.microsoft.com/office/drawing/2014/main" id="{20FB9DD0-5427-4526-A415-46DC28818628}"/>
               </a:ext>
             </a:extLst>
           </p:cNvPr>
@@ -7571,7 +7571,7 @@
     </p:spTree>
     <p:extLst>
       <p:ext uri="{BB962C8B-B14F-4D97-AF65-F5344CB8AC3E}">
-        <p14:creationId xmlns:p14="http://schemas.microsoft.com/office/powerpoint/2010/main" val="1072881633"/>
+        <p14:creationId xmlns:p14="http://schemas.microsoft.com/office/powerpoint/2010/main" val="2065905183"/>
       </p:ext>
     </p:extLst>
   </p:cSld>
@@ -7769,10 +7769,10 @@
       </p:grpSpPr>
       <p:sp>
         <p:nvSpPr>
-          <p:cNvPr id="23" name="">
-            <a:extLst xmlns:a="http://schemas.openxmlformats.org/drawingml/2006/main">
-              <a:ext uri="{FF2B5EF4-FFF2-40B4-BE49-F238E27FC236}">
-                <a16:creationId xmlns:a16="http://schemas.microsoft.com/office/drawing/2014/main" id="{68C7E7A6-6F7E-473E-AD12-60632417EAA3}"/>
+          <p:cNvPr id="26" name="">
+            <a:extLst xmlns:a="http://schemas.openxmlformats.org/drawingml/2006/main">
+              <a:ext uri="{FF2B5EF4-FFF2-40B4-BE49-F238E27FC236}">
+                <a16:creationId xmlns:a16="http://schemas.microsoft.com/office/drawing/2014/main" id="{AB2F81C1-D718-4982-8E73-EFF87B99A1C1}"/>
               </a:ext>
             </a:extLst>
           </p:cNvPr>
@@ -7804,7 +7804,7 @@
           <p:cNvPr id="2" name="">
             <a:extLst xmlns:a="http://schemas.openxmlformats.org/drawingml/2006/main">
               <a:ext uri="{FF2B5EF4-FFF2-40B4-BE49-F238E27FC236}">
-                <a16:creationId xmlns:a16="http://schemas.microsoft.com/office/drawing/2014/main" id="{AD80BC1B-E24C-41ED-9404-09FF20381157}"/>
+                <a16:creationId xmlns:a16="http://schemas.microsoft.com/office/drawing/2014/main" id="{D356288C-E447-4580-AB30-C9A9BEDEB998}"/>
               </a:ext>
             </a:extLst>
           </p:cNvPr>
@@ -7861,7 +7861,7 @@
           <p:cNvPr id="3" name="">
             <a:extLst xmlns:a="http://schemas.openxmlformats.org/drawingml/2006/main">
               <a:ext uri="{FF2B5EF4-FFF2-40B4-BE49-F238E27FC236}">
-                <a16:creationId xmlns:a16="http://schemas.microsoft.com/office/drawing/2014/main" id="{B4329428-A441-48A8-A3A5-4536998BD7B4}"/>
+                <a16:creationId xmlns:a16="http://schemas.microsoft.com/office/drawing/2014/main" id="{2217A9DC-E3FF-4C1B-B034-CEF27C5F9E3C}"/>
               </a:ext>
             </a:extLst>
           </p:cNvPr>
@@ -7893,7 +7893,7 @@
           <p:cNvPr id="4" name="">
             <a:extLst xmlns:a="http://schemas.openxmlformats.org/drawingml/2006/main">
               <a:ext uri="{FF2B5EF4-FFF2-40B4-BE49-F238E27FC236}">
-                <a16:creationId xmlns:a16="http://schemas.microsoft.com/office/drawing/2014/main" id="{3B3B6D2B-FAB5-4F92-8352-A6AB21B158DC}"/>
+                <a16:creationId xmlns:a16="http://schemas.microsoft.com/office/drawing/2014/main" id="{EDC5FF09-1F61-48D6-BC7D-D576C95D0A20}"/>
               </a:ext>
             </a:extLst>
           </p:cNvPr>
@@ -7950,7 +7950,7 @@
           <p:cNvPr id="5" name="">
             <a:extLst xmlns:a="http://schemas.openxmlformats.org/drawingml/2006/main">
               <a:ext uri="{FF2B5EF4-FFF2-40B4-BE49-F238E27FC236}">
-                <a16:creationId xmlns:a16="http://schemas.microsoft.com/office/drawing/2014/main" id="{17B8CFE2-31F3-4DD2-B853-A0F69FF0CF80}"/>
+                <a16:creationId xmlns:a16="http://schemas.microsoft.com/office/drawing/2014/main" id="{E2F63113-60F0-494B-ABA7-E508BB75316C}"/>
               </a:ext>
             </a:extLst>
           </p:cNvPr>
@@ -8007,7 +8007,7 @@
           <p:cNvPr id="6" name="">
             <a:extLst xmlns:a="http://schemas.openxmlformats.org/drawingml/2006/main">
               <a:ext uri="{FF2B5EF4-FFF2-40B4-BE49-F238E27FC236}">
-                <a16:creationId xmlns:a16="http://schemas.microsoft.com/office/drawing/2014/main" id="{9CEDC2E6-0B76-4A1F-80E5-01FA68047E13}"/>
+                <a16:creationId xmlns:a16="http://schemas.microsoft.com/office/drawing/2014/main" id="{8A51192D-464D-45FB-AFAA-784C567F885C}"/>
               </a:ext>
             </a:extLst>
           </p:cNvPr>
@@ -8064,7 +8064,7 @@
           <p:cNvPr id="7" name="">
             <a:extLst xmlns:a="http://schemas.openxmlformats.org/drawingml/2006/main">
               <a:ext uri="{FF2B5EF4-FFF2-40B4-BE49-F238E27FC236}">
-                <a16:creationId xmlns:a16="http://schemas.microsoft.com/office/drawing/2014/main" id="{380DF0F8-C29C-4906-BD60-3B848C5330EA}"/>
+                <a16:creationId xmlns:a16="http://schemas.microsoft.com/office/drawing/2014/main" id="{2BCDEC24-86CA-4916-88F7-73B41903E227}"/>
               </a:ext>
             </a:extLst>
           </p:cNvPr>
@@ -8096,7 +8096,7 @@
           <p:cNvPr id="8" name="">
             <a:extLst xmlns:a="http://schemas.openxmlformats.org/drawingml/2006/main">
               <a:ext uri="{FF2B5EF4-FFF2-40B4-BE49-F238E27FC236}">
-                <a16:creationId xmlns:a16="http://schemas.microsoft.com/office/drawing/2014/main" id="{AE805F24-3E7D-4852-926D-63600709E0AC}"/>
+                <a16:creationId xmlns:a16="http://schemas.microsoft.com/office/drawing/2014/main" id="{8E2A6AB6-5297-427E-AF1A-0F39CFD82DC2}"/>
               </a:ext>
             </a:extLst>
           </p:cNvPr>
@@ -8153,7 +8153,7 @@
           <p:cNvPr id="9" name="">
             <a:extLst xmlns:a="http://schemas.openxmlformats.org/drawingml/2006/main">
               <a:ext uri="{FF2B5EF4-FFF2-40B4-BE49-F238E27FC236}">
-                <a16:creationId xmlns:a16="http://schemas.microsoft.com/office/drawing/2014/main" id="{8EB65C25-CFC4-4BAB-A9D2-D114788E9EDD}"/>
+                <a16:creationId xmlns:a16="http://schemas.microsoft.com/office/drawing/2014/main" id="{F3E3C855-4FE0-4F9E-BC7E-054F85E7752C}"/>
               </a:ext>
             </a:extLst>
           </p:cNvPr>
@@ -8210,19 +8210,19 @@
           <p:cNvPr id="10" name="">
             <a:extLst xmlns:a="http://schemas.openxmlformats.org/drawingml/2006/main">
               <a:ext uri="{FF2B5EF4-FFF2-40B4-BE49-F238E27FC236}">
-                <a16:creationId xmlns:a16="http://schemas.microsoft.com/office/drawing/2014/main" id="{57A68FC4-D7DF-4A9D-9711-F2195230CDEF}"/>
-              </a:ext>
-            </a:extLst>
-          </p:cNvPr>
-          <p:cNvSpPr>
-            <a:spLocks xmlns:a="http://schemas.openxmlformats.org/drawingml/2006/main" noGrp="1"/>
-          </p:cNvSpPr>
-          <p:nvPr/>
-        </p:nvSpPr>
-        <p:spPr>
-          <a:xfrm xmlns:a="http://schemas.openxmlformats.org/drawingml/2006/main">
-            <a:off x="914400" y="1257300"/>
-            <a:ext cx="10363200" cy="781050"/>
+                <a16:creationId xmlns:a16="http://schemas.microsoft.com/office/drawing/2014/main" id="{7504B31E-F821-4FE8-ABEF-360728C46C8A}"/>
+              </a:ext>
+            </a:extLst>
+          </p:cNvPr>
+          <p:cNvSpPr>
+            <a:spLocks xmlns:a="http://schemas.openxmlformats.org/drawingml/2006/main" noGrp="1"/>
+          </p:cNvSpPr>
+          <p:nvPr/>
+        </p:nvSpPr>
+        <p:spPr>
+          <a:xfrm xmlns:a="http://schemas.openxmlformats.org/drawingml/2006/main">
+            <a:off x="857250" y="1219200"/>
+            <a:ext cx="10477500" cy="742950"/>
           </a:xfrm>
           <a:prstGeom xmlns:a="http://schemas.openxmlformats.org/drawingml/2006/main" prst="rect">
             <a:avLst/>
@@ -8239,7 +8239,7 @@
           <a:lstStyle xmlns:a="http://schemas.openxmlformats.org/drawingml/2006/main"/>
           <a:p xmlns:a="http://schemas.openxmlformats.org/drawingml/2006/main">
             <a:pPr algn="ctr">
-              <a:defRPr sz="2175" b="1">
+              <a:defRPr sz="2100" b="1">
                 <a:solidFill>
                   <a:srgbClr val="17253A"/>
                 </a:solidFill>
@@ -8249,7 +8249,7 @@
               </a:defRPr>
             </a:pPr>
             <a:r>
-              <a:rPr sz="2175" b="1">
+              <a:rPr sz="2100" b="1">
                 <a:solidFill>
                   <a:srgbClr val="17253A"/>
                 </a:solidFill>
@@ -8267,28 +8267,30 @@
           <p:cNvPr id="11" name="">
             <a:extLst xmlns:a="http://schemas.openxmlformats.org/drawingml/2006/main">
               <a:ext uri="{FF2B5EF4-FFF2-40B4-BE49-F238E27FC236}">
-                <a16:creationId xmlns:a16="http://schemas.microsoft.com/office/drawing/2014/main" id="{31A70B36-3225-4E87-9759-286EF6EE2A9D}"/>
-              </a:ext>
-            </a:extLst>
-          </p:cNvPr>
-          <p:cNvSpPr>
-            <a:spLocks xmlns:a="http://schemas.openxmlformats.org/drawingml/2006/main" noGrp="1"/>
-          </p:cNvSpPr>
-          <p:nvPr/>
-        </p:nvSpPr>
-        <p:spPr>
-          <a:xfrm xmlns:a="http://schemas.openxmlformats.org/drawingml/2006/main">
-            <a:off x="1000125" y="2247900"/>
-            <a:ext cx="476250" cy="476250"/>
-          </a:xfrm>
-          <a:prstGeom xmlns:a="http://schemas.openxmlformats.org/drawingml/2006/main" prst="ellipse">
+                <a16:creationId xmlns:a16="http://schemas.microsoft.com/office/drawing/2014/main" id="{066BB0B0-3041-4EA0-AABC-7BAEC8C3DD41}"/>
+              </a:ext>
+            </a:extLst>
+          </p:cNvPr>
+          <p:cNvSpPr>
+            <a:spLocks xmlns:a="http://schemas.openxmlformats.org/drawingml/2006/main" noGrp="1"/>
+          </p:cNvSpPr>
+          <p:nvPr/>
+        </p:nvSpPr>
+        <p:spPr>
+          <a:xfrm xmlns:a="http://schemas.openxmlformats.org/drawingml/2006/main">
+            <a:off x="971550" y="2124075"/>
+            <a:ext cx="38100" cy="3524250"/>
+          </a:xfrm>
+          <a:prstGeom xmlns:a="http://schemas.openxmlformats.org/drawingml/2006/main" prst="rect">
             <a:avLst/>
           </a:prstGeom>
           <a:solidFill xmlns:a="http://schemas.openxmlformats.org/drawingml/2006/main">
-            <a:srgbClr val="18324A"/>
+            <a:srgbClr val="2C6E73"/>
           </a:solidFill>
           <a:ln xmlns:a="http://schemas.openxmlformats.org/drawingml/2006/main" w="0">
-            <a:noFill/>
+            <a:solidFill>
+              <a:srgbClr val="2C6E73"/>
+            </a:solidFill>
           </a:ln>
         </p:spPr>
       </p:sp>
@@ -8297,19 +8299,19 @@
           <p:cNvPr id="12" name="">
             <a:extLst xmlns:a="http://schemas.openxmlformats.org/drawingml/2006/main">
               <a:ext uri="{FF2B5EF4-FFF2-40B4-BE49-F238E27FC236}">
-                <a16:creationId xmlns:a16="http://schemas.microsoft.com/office/drawing/2014/main" id="{0720AC21-E74D-46F1-AFF4-0808B3C6FB84}"/>
-              </a:ext>
-            </a:extLst>
-          </p:cNvPr>
-          <p:cNvSpPr>
-            <a:spLocks xmlns:a="http://schemas.openxmlformats.org/drawingml/2006/main" noGrp="1"/>
-          </p:cNvSpPr>
-          <p:nvPr/>
-        </p:nvSpPr>
-        <p:spPr>
-          <a:xfrm xmlns:a="http://schemas.openxmlformats.org/drawingml/2006/main">
-            <a:off x="1000125" y="2276475"/>
-            <a:ext cx="476250" cy="419100"/>
+                <a16:creationId xmlns:a16="http://schemas.microsoft.com/office/drawing/2014/main" id="{F57DC976-8554-4D96-8573-6D3A2FA8DBFC}"/>
+              </a:ext>
+            </a:extLst>
+          </p:cNvPr>
+          <p:cNvSpPr>
+            <a:spLocks xmlns:a="http://schemas.openxmlformats.org/drawingml/2006/main" noGrp="1"/>
+          </p:cNvSpPr>
+          <p:nvPr/>
+        </p:nvSpPr>
+        <p:spPr>
+          <a:xfrm xmlns:a="http://schemas.openxmlformats.org/drawingml/2006/main">
+            <a:off x="1162050" y="2200275"/>
+            <a:ext cx="400050" cy="400050"/>
           </a:xfrm>
           <a:prstGeom xmlns:a="http://schemas.openxmlformats.org/drawingml/2006/main" prst="rect">
             <a:avLst/>
@@ -8326,9 +8328,9 @@
           <a:lstStyle xmlns:a="http://schemas.openxmlformats.org/drawingml/2006/main"/>
           <a:p xmlns:a="http://schemas.openxmlformats.org/drawingml/2006/main">
             <a:pPr algn="ctr">
-              <a:defRPr sz="1350" b="1">
-                <a:solidFill>
-                  <a:srgbClr val="FFFFFF"/>
+              <a:defRPr sz="1125" b="1">
+                <a:solidFill>
+                  <a:srgbClr val="2C6E73"/>
                 </a:solidFill>
                 <a:latin typeface="Arial"/>
                 <a:ea typeface="Arial"/>
@@ -8336,9 +8338,9 @@
               </a:defRPr>
             </a:pPr>
             <a:r>
-              <a:rPr sz="1350" b="1">
-                <a:solidFill>
-                  <a:srgbClr val="FFFFFF"/>
+              <a:rPr sz="1125" b="1">
+                <a:solidFill>
+                  <a:srgbClr val="2C6E73"/>
                 </a:solidFill>
                 <a:latin typeface="Arial"/>
                 <a:ea typeface="Arial"/>
@@ -8354,19 +8356,19 @@
           <p:cNvPr id="13" name="">
             <a:extLst xmlns:a="http://schemas.openxmlformats.org/drawingml/2006/main">
               <a:ext uri="{FF2B5EF4-FFF2-40B4-BE49-F238E27FC236}">
-                <a16:creationId xmlns:a16="http://schemas.microsoft.com/office/drawing/2014/main" id="{09144DB4-A772-490C-A184-B9682CC9F199}"/>
-              </a:ext>
-            </a:extLst>
-          </p:cNvPr>
-          <p:cNvSpPr>
-            <a:spLocks xmlns:a="http://schemas.openxmlformats.org/drawingml/2006/main" noGrp="1"/>
-          </p:cNvSpPr>
-          <p:nvPr/>
-        </p:nvSpPr>
-        <p:spPr>
-          <a:xfrm xmlns:a="http://schemas.openxmlformats.org/drawingml/2006/main">
-            <a:off x="1714500" y="2181225"/>
-            <a:ext cx="9429750" cy="609600"/>
+                <a16:creationId xmlns:a16="http://schemas.microsoft.com/office/drawing/2014/main" id="{361C3270-FBC0-4614-B50C-E3E69CBEA0CD}"/>
+              </a:ext>
+            </a:extLst>
+          </p:cNvPr>
+          <p:cNvSpPr>
+            <a:spLocks xmlns:a="http://schemas.openxmlformats.org/drawingml/2006/main" noGrp="1"/>
+          </p:cNvSpPr>
+          <p:nvPr/>
+        </p:nvSpPr>
+        <p:spPr>
+          <a:xfrm xmlns:a="http://schemas.openxmlformats.org/drawingml/2006/main">
+            <a:off x="1714500" y="2114550"/>
+            <a:ext cx="9525000" cy="638175"/>
           </a:xfrm>
           <a:prstGeom xmlns:a="http://schemas.openxmlformats.org/drawingml/2006/main" prst="rect">
             <a:avLst/>
@@ -8383,7 +8385,7 @@
           <a:lstStyle xmlns:a="http://schemas.openxmlformats.org/drawingml/2006/main"/>
           <a:p xmlns:a="http://schemas.openxmlformats.org/drawingml/2006/main">
             <a:pPr algn="l">
-              <a:defRPr sz="1500" b="0">
+              <a:defRPr sz="1575" b="0">
                 <a:solidFill>
                   <a:srgbClr val="17253A"/>
                 </a:solidFill>
@@ -8393,7 +8395,7 @@
               </a:defRPr>
             </a:pPr>
             <a:r>
-              <a:rPr sz="1500" b="0">
+              <a:rPr sz="1575" b="0">
                 <a:solidFill>
                   <a:srgbClr val="17253A"/>
                 </a:solidFill>
@@ -8401,7 +8403,7 @@
                 <a:ea typeface="Arial"/>
                 <a:cs typeface="Arial"/>
               </a:rPr>
-              <a:t>Identify the structure: Read the number in three-digit periods from left to right.</a:t>
+              <a:t>5,906,120     5,960,102</a:t>
             </a:r>
           </a:p>
         </p:txBody>
@@ -8411,28 +8413,30 @@
           <p:cNvPr id="14" name="">
             <a:extLst xmlns:a="http://schemas.openxmlformats.org/drawingml/2006/main">
               <a:ext uri="{FF2B5EF4-FFF2-40B4-BE49-F238E27FC236}">
-                <a16:creationId xmlns:a16="http://schemas.microsoft.com/office/drawing/2014/main" id="{C0844000-00B0-4DB1-AA28-E28F590F3D08}"/>
-              </a:ext>
-            </a:extLst>
-          </p:cNvPr>
-          <p:cNvSpPr>
-            <a:spLocks xmlns:a="http://schemas.openxmlformats.org/drawingml/2006/main" noGrp="1"/>
-          </p:cNvSpPr>
-          <p:nvPr/>
-        </p:nvSpPr>
-        <p:spPr>
-          <a:xfrm xmlns:a="http://schemas.openxmlformats.org/drawingml/2006/main">
-            <a:off x="1000125" y="2990850"/>
-            <a:ext cx="476250" cy="476250"/>
-          </a:xfrm>
-          <a:prstGeom xmlns:a="http://schemas.openxmlformats.org/drawingml/2006/main" prst="ellipse">
+                <a16:creationId xmlns:a16="http://schemas.microsoft.com/office/drawing/2014/main" id="{D49B3759-49B9-4E2F-AC55-7E7113415750}"/>
+              </a:ext>
+            </a:extLst>
+          </p:cNvPr>
+          <p:cNvSpPr>
+            <a:spLocks xmlns:a="http://schemas.openxmlformats.org/drawingml/2006/main" noGrp="1"/>
+          </p:cNvSpPr>
+          <p:nvPr/>
+        </p:nvSpPr>
+        <p:spPr>
+          <a:xfrm xmlns:a="http://schemas.openxmlformats.org/drawingml/2006/main">
+            <a:off x="1714500" y="2771775"/>
+            <a:ext cx="9334500" cy="9525"/>
+          </a:xfrm>
+          <a:prstGeom xmlns:a="http://schemas.openxmlformats.org/drawingml/2006/main" prst="rect">
             <a:avLst/>
           </a:prstGeom>
           <a:solidFill xmlns:a="http://schemas.openxmlformats.org/drawingml/2006/main">
-            <a:srgbClr val="2C6E73"/>
+            <a:srgbClr val="D9E0E6"/>
           </a:solidFill>
           <a:ln xmlns:a="http://schemas.openxmlformats.org/drawingml/2006/main" w="0">
-            <a:noFill/>
+            <a:solidFill>
+              <a:srgbClr val="D9E0E6"/>
+            </a:solidFill>
           </a:ln>
         </p:spPr>
       </p:sp>
@@ -8441,19 +8445,19 @@
           <p:cNvPr id="15" name="">
             <a:extLst xmlns:a="http://schemas.openxmlformats.org/drawingml/2006/main">
               <a:ext uri="{FF2B5EF4-FFF2-40B4-BE49-F238E27FC236}">
-                <a16:creationId xmlns:a16="http://schemas.microsoft.com/office/drawing/2014/main" id="{0E004FA3-AA81-434A-B58B-F8EC8BDD3C67}"/>
-              </a:ext>
-            </a:extLst>
-          </p:cNvPr>
-          <p:cNvSpPr>
-            <a:spLocks xmlns:a="http://schemas.openxmlformats.org/drawingml/2006/main" noGrp="1"/>
-          </p:cNvSpPr>
-          <p:nvPr/>
-        </p:nvSpPr>
-        <p:spPr>
-          <a:xfrm xmlns:a="http://schemas.openxmlformats.org/drawingml/2006/main">
-            <a:off x="1000125" y="3019425"/>
-            <a:ext cx="476250" cy="419100"/>
+                <a16:creationId xmlns:a16="http://schemas.microsoft.com/office/drawing/2014/main" id="{B6CA2AA1-C5CC-4C2D-BFAF-2DE08E71066A}"/>
+              </a:ext>
+            </a:extLst>
+          </p:cNvPr>
+          <p:cNvSpPr>
+            <a:spLocks xmlns:a="http://schemas.openxmlformats.org/drawingml/2006/main" noGrp="1"/>
+          </p:cNvSpPr>
+          <p:nvPr/>
+        </p:nvSpPr>
+        <p:spPr>
+          <a:xfrm xmlns:a="http://schemas.openxmlformats.org/drawingml/2006/main">
+            <a:off x="1162050" y="2905125"/>
+            <a:ext cx="400050" cy="400050"/>
           </a:xfrm>
           <a:prstGeom xmlns:a="http://schemas.openxmlformats.org/drawingml/2006/main" prst="rect">
             <a:avLst/>
@@ -8470,9 +8474,9 @@
           <a:lstStyle xmlns:a="http://schemas.openxmlformats.org/drawingml/2006/main"/>
           <a:p xmlns:a="http://schemas.openxmlformats.org/drawingml/2006/main">
             <a:pPr algn="ctr">
-              <a:defRPr sz="1350" b="1">
-                <a:solidFill>
-                  <a:srgbClr val="FFFFFF"/>
+              <a:defRPr sz="1125" b="1">
+                <a:solidFill>
+                  <a:srgbClr val="2C6E73"/>
                 </a:solidFill>
                 <a:latin typeface="Arial"/>
                 <a:ea typeface="Arial"/>
@@ -8480,9 +8484,9 @@
               </a:defRPr>
             </a:pPr>
             <a:r>
-              <a:rPr sz="1350" b="1">
-                <a:solidFill>
-                  <a:srgbClr val="FFFFFF"/>
+              <a:rPr sz="1125" b="1">
+                <a:solidFill>
+                  <a:srgbClr val="2C6E73"/>
                 </a:solidFill>
                 <a:latin typeface="Arial"/>
                 <a:ea typeface="Arial"/>
@@ -8498,19 +8502,19 @@
           <p:cNvPr id="16" name="">
             <a:extLst xmlns:a="http://schemas.openxmlformats.org/drawingml/2006/main">
               <a:ext uri="{FF2B5EF4-FFF2-40B4-BE49-F238E27FC236}">
-                <a16:creationId xmlns:a16="http://schemas.microsoft.com/office/drawing/2014/main" id="{63F03778-5121-4556-B837-282E02A8EA43}"/>
-              </a:ext>
-            </a:extLst>
-          </p:cNvPr>
-          <p:cNvSpPr>
-            <a:spLocks xmlns:a="http://schemas.openxmlformats.org/drawingml/2006/main" noGrp="1"/>
-          </p:cNvSpPr>
-          <p:nvPr/>
-        </p:nvSpPr>
-        <p:spPr>
-          <a:xfrm xmlns:a="http://schemas.openxmlformats.org/drawingml/2006/main">
-            <a:off x="1714500" y="2924175"/>
-            <a:ext cx="9429750" cy="609600"/>
+                <a16:creationId xmlns:a16="http://schemas.microsoft.com/office/drawing/2014/main" id="{57337D16-71F4-4923-B7A0-5C714F2C5139}"/>
+              </a:ext>
+            </a:extLst>
+          </p:cNvPr>
+          <p:cNvSpPr>
+            <a:spLocks xmlns:a="http://schemas.openxmlformats.org/drawingml/2006/main" noGrp="1"/>
+          </p:cNvSpPr>
+          <p:nvPr/>
+        </p:nvSpPr>
+        <p:spPr>
+          <a:xfrm xmlns:a="http://schemas.openxmlformats.org/drawingml/2006/main">
+            <a:off x="1714500" y="2819400"/>
+            <a:ext cx="9525000" cy="638175"/>
           </a:xfrm>
           <a:prstGeom xmlns:a="http://schemas.openxmlformats.org/drawingml/2006/main" prst="rect">
             <a:avLst/>
@@ -8527,7 +8531,7 @@
           <a:lstStyle xmlns:a="http://schemas.openxmlformats.org/drawingml/2006/main"/>
           <a:p xmlns:a="http://schemas.openxmlformats.org/drawingml/2006/main">
             <a:pPr algn="l">
-              <a:defRPr sz="1500" b="0">
+              <a:defRPr sz="1575" b="0">
                 <a:solidFill>
                   <a:srgbClr val="17253A"/>
                 </a:solidFill>
@@ -8537,7 +8541,7 @@
               </a:defRPr>
             </a:pPr>
             <a:r>
-              <a:rPr sz="1500" b="0">
+              <a:rPr sz="1575" b="0">
                 <a:solidFill>
                   <a:srgbClr val="17253A"/>
                 </a:solidFill>
@@ -8545,7 +8549,7 @@
                 <a:ea typeface="Arial"/>
                 <a:cs typeface="Arial"/>
               </a:rPr>
-              <a:t>Set up the method: Record each digit in the correct place-value column.</a:t>
+              <a:t>Millions: 5 = 5</a:t>
             </a:r>
           </a:p>
         </p:txBody>
@@ -8555,28 +8559,30 @@
           <p:cNvPr id="17" name="">
             <a:extLst xmlns:a="http://schemas.openxmlformats.org/drawingml/2006/main">
               <a:ext uri="{FF2B5EF4-FFF2-40B4-BE49-F238E27FC236}">
-                <a16:creationId xmlns:a16="http://schemas.microsoft.com/office/drawing/2014/main" id="{2DBA033D-1A22-4259-BA46-C867515F779F}"/>
-              </a:ext>
-            </a:extLst>
-          </p:cNvPr>
-          <p:cNvSpPr>
-            <a:spLocks xmlns:a="http://schemas.openxmlformats.org/drawingml/2006/main" noGrp="1"/>
-          </p:cNvSpPr>
-          <p:nvPr/>
-        </p:nvSpPr>
-        <p:spPr>
-          <a:xfrm xmlns:a="http://schemas.openxmlformats.org/drawingml/2006/main">
-            <a:off x="1000125" y="3733800"/>
-            <a:ext cx="476250" cy="476250"/>
-          </a:xfrm>
-          <a:prstGeom xmlns:a="http://schemas.openxmlformats.org/drawingml/2006/main" prst="ellipse">
+                <a16:creationId xmlns:a16="http://schemas.microsoft.com/office/drawing/2014/main" id="{00469CAF-862C-4765-B39B-DBC67BD12282}"/>
+              </a:ext>
+            </a:extLst>
+          </p:cNvPr>
+          <p:cNvSpPr>
+            <a:spLocks xmlns:a="http://schemas.openxmlformats.org/drawingml/2006/main" noGrp="1"/>
+          </p:cNvSpPr>
+          <p:nvPr/>
+        </p:nvSpPr>
+        <p:spPr>
+          <a:xfrm xmlns:a="http://schemas.openxmlformats.org/drawingml/2006/main">
+            <a:off x="1714500" y="3476625"/>
+            <a:ext cx="9334500" cy="9525"/>
+          </a:xfrm>
+          <a:prstGeom xmlns:a="http://schemas.openxmlformats.org/drawingml/2006/main" prst="rect">
             <a:avLst/>
           </a:prstGeom>
           <a:solidFill xmlns:a="http://schemas.openxmlformats.org/drawingml/2006/main">
-            <a:srgbClr val="2C6E73"/>
+            <a:srgbClr val="D9E0E6"/>
           </a:solidFill>
           <a:ln xmlns:a="http://schemas.openxmlformats.org/drawingml/2006/main" w="0">
-            <a:noFill/>
+            <a:solidFill>
+              <a:srgbClr val="D9E0E6"/>
+            </a:solidFill>
           </a:ln>
         </p:spPr>
       </p:sp>
@@ -8585,19 +8591,19 @@
           <p:cNvPr id="18" name="">
             <a:extLst xmlns:a="http://schemas.openxmlformats.org/drawingml/2006/main">
               <a:ext uri="{FF2B5EF4-FFF2-40B4-BE49-F238E27FC236}">
-                <a16:creationId xmlns:a16="http://schemas.microsoft.com/office/drawing/2014/main" id="{C1781512-56BA-4737-BBBB-DC87945C6435}"/>
-              </a:ext>
-            </a:extLst>
-          </p:cNvPr>
-          <p:cNvSpPr>
-            <a:spLocks xmlns:a="http://schemas.openxmlformats.org/drawingml/2006/main" noGrp="1"/>
-          </p:cNvSpPr>
-          <p:nvPr/>
-        </p:nvSpPr>
-        <p:spPr>
-          <a:xfrm xmlns:a="http://schemas.openxmlformats.org/drawingml/2006/main">
-            <a:off x="1000125" y="3762375"/>
-            <a:ext cx="476250" cy="419100"/>
+                <a16:creationId xmlns:a16="http://schemas.microsoft.com/office/drawing/2014/main" id="{E387D046-2628-4FAE-89CC-19E6DE4558D1}"/>
+              </a:ext>
+            </a:extLst>
+          </p:cNvPr>
+          <p:cNvSpPr>
+            <a:spLocks xmlns:a="http://schemas.openxmlformats.org/drawingml/2006/main" noGrp="1"/>
+          </p:cNvSpPr>
+          <p:nvPr/>
+        </p:nvSpPr>
+        <p:spPr>
+          <a:xfrm xmlns:a="http://schemas.openxmlformats.org/drawingml/2006/main">
+            <a:off x="1162050" y="3609975"/>
+            <a:ext cx="400050" cy="400050"/>
           </a:xfrm>
           <a:prstGeom xmlns:a="http://schemas.openxmlformats.org/drawingml/2006/main" prst="rect">
             <a:avLst/>
@@ -8614,9 +8620,9 @@
           <a:lstStyle xmlns:a="http://schemas.openxmlformats.org/drawingml/2006/main"/>
           <a:p xmlns:a="http://schemas.openxmlformats.org/drawingml/2006/main">
             <a:pPr algn="ctr">
-              <a:defRPr sz="1350" b="1">
-                <a:solidFill>
-                  <a:srgbClr val="FFFFFF"/>
+              <a:defRPr sz="1125" b="1">
+                <a:solidFill>
+                  <a:srgbClr val="2C6E73"/>
                 </a:solidFill>
                 <a:latin typeface="Arial"/>
                 <a:ea typeface="Arial"/>
@@ -8624,9 +8630,9 @@
               </a:defRPr>
             </a:pPr>
             <a:r>
-              <a:rPr sz="1350" b="1">
-                <a:solidFill>
-                  <a:srgbClr val="FFFFFF"/>
+              <a:rPr sz="1125" b="1">
+                <a:solidFill>
+                  <a:srgbClr val="2C6E73"/>
                 </a:solidFill>
                 <a:latin typeface="Arial"/>
                 <a:ea typeface="Arial"/>
@@ -8642,19 +8648,19 @@
           <p:cNvPr id="19" name="">
             <a:extLst xmlns:a="http://schemas.openxmlformats.org/drawingml/2006/main">
               <a:ext uri="{FF2B5EF4-FFF2-40B4-BE49-F238E27FC236}">
-                <a16:creationId xmlns:a16="http://schemas.microsoft.com/office/drawing/2014/main" id="{561AF978-0326-45EC-80E6-0527F41069D5}"/>
-              </a:ext>
-            </a:extLst>
-          </p:cNvPr>
-          <p:cNvSpPr>
-            <a:spLocks xmlns:a="http://schemas.openxmlformats.org/drawingml/2006/main" noGrp="1"/>
-          </p:cNvSpPr>
-          <p:nvPr/>
-        </p:nvSpPr>
-        <p:spPr>
-          <a:xfrm xmlns:a="http://schemas.openxmlformats.org/drawingml/2006/main">
-            <a:off x="1714500" y="3667125"/>
-            <a:ext cx="9429750" cy="609600"/>
+                <a16:creationId xmlns:a16="http://schemas.microsoft.com/office/drawing/2014/main" id="{CD86D7CF-3DF0-44BF-9F70-EFAFC7FA0FE3}"/>
+              </a:ext>
+            </a:extLst>
+          </p:cNvPr>
+          <p:cNvSpPr>
+            <a:spLocks xmlns:a="http://schemas.openxmlformats.org/drawingml/2006/main" noGrp="1"/>
+          </p:cNvSpPr>
+          <p:nvPr/>
+        </p:nvSpPr>
+        <p:spPr>
+          <a:xfrm xmlns:a="http://schemas.openxmlformats.org/drawingml/2006/main">
+            <a:off x="1714500" y="3524250"/>
+            <a:ext cx="9525000" cy="638175"/>
           </a:xfrm>
           <a:prstGeom xmlns:a="http://schemas.openxmlformats.org/drawingml/2006/main" prst="rect">
             <a:avLst/>
@@ -8671,7 +8677,7 @@
           <a:lstStyle xmlns:a="http://schemas.openxmlformats.org/drawingml/2006/main"/>
           <a:p xmlns:a="http://schemas.openxmlformats.org/drawingml/2006/main">
             <a:pPr algn="l">
-              <a:defRPr sz="1500" b="0">
+              <a:defRPr sz="1575" b="0">
                 <a:solidFill>
                   <a:srgbClr val="17253A"/>
                 </a:solidFill>
@@ -8681,7 +8687,7 @@
               </a:defRPr>
             </a:pPr>
             <a:r>
-              <a:rPr sz="1500" b="0">
+              <a:rPr sz="1575" b="0">
                 <a:solidFill>
                   <a:srgbClr val="17253A"/>
                 </a:solidFill>
@@ -8689,7 +8695,7 @@
                 <a:ea typeface="Arial"/>
                 <a:cs typeface="Arial"/>
               </a:rPr>
-              <a:t>Complete the calculation: 5,906,120 &lt; 5,960,102.</a:t>
+              <a:t>Hundred-thousands: 9 = 9</a:t>
             </a:r>
           </a:p>
         </p:txBody>
@@ -8699,28 +8705,30 @@
           <p:cNvPr id="20" name="">
             <a:extLst xmlns:a="http://schemas.openxmlformats.org/drawingml/2006/main">
               <a:ext uri="{FF2B5EF4-FFF2-40B4-BE49-F238E27FC236}">
-                <a16:creationId xmlns:a16="http://schemas.microsoft.com/office/drawing/2014/main" id="{65F9D1E0-5D71-4064-897D-5C961B00D33E}"/>
-              </a:ext>
-            </a:extLst>
-          </p:cNvPr>
-          <p:cNvSpPr>
-            <a:spLocks xmlns:a="http://schemas.openxmlformats.org/drawingml/2006/main" noGrp="1"/>
-          </p:cNvSpPr>
-          <p:nvPr/>
-        </p:nvSpPr>
-        <p:spPr>
-          <a:xfrm xmlns:a="http://schemas.openxmlformats.org/drawingml/2006/main">
-            <a:off x="1000125" y="4476750"/>
-            <a:ext cx="476250" cy="476250"/>
-          </a:xfrm>
-          <a:prstGeom xmlns:a="http://schemas.openxmlformats.org/drawingml/2006/main" prst="ellipse">
+                <a16:creationId xmlns:a16="http://schemas.microsoft.com/office/drawing/2014/main" id="{19BA8BEB-752A-42C0-B93D-26955F88FE01}"/>
+              </a:ext>
+            </a:extLst>
+          </p:cNvPr>
+          <p:cNvSpPr>
+            <a:spLocks xmlns:a="http://schemas.openxmlformats.org/drawingml/2006/main" noGrp="1"/>
+          </p:cNvSpPr>
+          <p:nvPr/>
+        </p:nvSpPr>
+        <p:spPr>
+          <a:xfrm xmlns:a="http://schemas.openxmlformats.org/drawingml/2006/main">
+            <a:off x="1714500" y="4181475"/>
+            <a:ext cx="9334500" cy="9525"/>
+          </a:xfrm>
+          <a:prstGeom xmlns:a="http://schemas.openxmlformats.org/drawingml/2006/main" prst="rect">
             <a:avLst/>
           </a:prstGeom>
           <a:solidFill xmlns:a="http://schemas.openxmlformats.org/drawingml/2006/main">
-            <a:srgbClr val="2C6E73"/>
+            <a:srgbClr val="D9E0E6"/>
           </a:solidFill>
           <a:ln xmlns:a="http://schemas.openxmlformats.org/drawingml/2006/main" w="0">
-            <a:noFill/>
+            <a:solidFill>
+              <a:srgbClr val="D9E0E6"/>
+            </a:solidFill>
           </a:ln>
         </p:spPr>
       </p:sp>
@@ -8729,19 +8737,19 @@
           <p:cNvPr id="21" name="">
             <a:extLst xmlns:a="http://schemas.openxmlformats.org/drawingml/2006/main">
               <a:ext uri="{FF2B5EF4-FFF2-40B4-BE49-F238E27FC236}">
-                <a16:creationId xmlns:a16="http://schemas.microsoft.com/office/drawing/2014/main" id="{3A94B5A0-A8D9-457B-A376-403A5C423B7B}"/>
-              </a:ext>
-            </a:extLst>
-          </p:cNvPr>
-          <p:cNvSpPr>
-            <a:spLocks xmlns:a="http://schemas.openxmlformats.org/drawingml/2006/main" noGrp="1"/>
-          </p:cNvSpPr>
-          <p:nvPr/>
-        </p:nvSpPr>
-        <p:spPr>
-          <a:xfrm xmlns:a="http://schemas.openxmlformats.org/drawingml/2006/main">
-            <a:off x="1000125" y="4505325"/>
-            <a:ext cx="476250" cy="419100"/>
+                <a16:creationId xmlns:a16="http://schemas.microsoft.com/office/drawing/2014/main" id="{8BFC1B35-FFAD-4489-8B4F-3C66AAE93AEB}"/>
+              </a:ext>
+            </a:extLst>
+          </p:cNvPr>
+          <p:cNvSpPr>
+            <a:spLocks xmlns:a="http://schemas.openxmlformats.org/drawingml/2006/main" noGrp="1"/>
+          </p:cNvSpPr>
+          <p:nvPr/>
+        </p:nvSpPr>
+        <p:spPr>
+          <a:xfrm xmlns:a="http://schemas.openxmlformats.org/drawingml/2006/main">
+            <a:off x="1162050" y="4314825"/>
+            <a:ext cx="400050" cy="400050"/>
           </a:xfrm>
           <a:prstGeom xmlns:a="http://schemas.openxmlformats.org/drawingml/2006/main" prst="rect">
             <a:avLst/>
@@ -8758,9 +8766,9 @@
           <a:lstStyle xmlns:a="http://schemas.openxmlformats.org/drawingml/2006/main"/>
           <a:p xmlns:a="http://schemas.openxmlformats.org/drawingml/2006/main">
             <a:pPr algn="ctr">
-              <a:defRPr sz="1350" b="1">
-                <a:solidFill>
-                  <a:srgbClr val="FFFFFF"/>
+              <a:defRPr sz="1125" b="1">
+                <a:solidFill>
+                  <a:srgbClr val="2C6E73"/>
                 </a:solidFill>
                 <a:latin typeface="Arial"/>
                 <a:ea typeface="Arial"/>
@@ -8768,9 +8776,9 @@
               </a:defRPr>
             </a:pPr>
             <a:r>
-              <a:rPr sz="1350" b="1">
-                <a:solidFill>
-                  <a:srgbClr val="FFFFFF"/>
+              <a:rPr sz="1125" b="1">
+                <a:solidFill>
+                  <a:srgbClr val="2C6E73"/>
                 </a:solidFill>
                 <a:latin typeface="Arial"/>
                 <a:ea typeface="Arial"/>
@@ -8786,19 +8794,19 @@
           <p:cNvPr id="22" name="">
             <a:extLst xmlns:a="http://schemas.openxmlformats.org/drawingml/2006/main">
               <a:ext uri="{FF2B5EF4-FFF2-40B4-BE49-F238E27FC236}">
-                <a16:creationId xmlns:a16="http://schemas.microsoft.com/office/drawing/2014/main" id="{401FAA6F-F707-4D3D-B6B3-276FED13B8F2}"/>
-              </a:ext>
-            </a:extLst>
-          </p:cNvPr>
-          <p:cNvSpPr>
-            <a:spLocks xmlns:a="http://schemas.openxmlformats.org/drawingml/2006/main" noGrp="1"/>
-          </p:cNvSpPr>
-          <p:nvPr/>
-        </p:nvSpPr>
-        <p:spPr>
-          <a:xfrm xmlns:a="http://schemas.openxmlformats.org/drawingml/2006/main">
-            <a:off x="1714500" y="4410075"/>
-            <a:ext cx="9429750" cy="609600"/>
+                <a16:creationId xmlns:a16="http://schemas.microsoft.com/office/drawing/2014/main" id="{0CE5269D-2618-417A-8383-D45EA9E02F3E}"/>
+              </a:ext>
+            </a:extLst>
+          </p:cNvPr>
+          <p:cNvSpPr>
+            <a:spLocks xmlns:a="http://schemas.openxmlformats.org/drawingml/2006/main" noGrp="1"/>
+          </p:cNvSpPr>
+          <p:nvPr/>
+        </p:nvSpPr>
+        <p:spPr>
+          <a:xfrm xmlns:a="http://schemas.openxmlformats.org/drawingml/2006/main">
+            <a:off x="1714500" y="4229100"/>
+            <a:ext cx="9525000" cy="638175"/>
           </a:xfrm>
           <a:prstGeom xmlns:a="http://schemas.openxmlformats.org/drawingml/2006/main" prst="rect">
             <a:avLst/>
@@ -8815,9 +8823,9 @@
           <a:lstStyle xmlns:a="http://schemas.openxmlformats.org/drawingml/2006/main"/>
           <a:p xmlns:a="http://schemas.openxmlformats.org/drawingml/2006/main">
             <a:pPr algn="l">
-              <a:defRPr sz="1500" b="1">
-                <a:solidFill>
-                  <a:srgbClr val="2F785D"/>
+              <a:defRPr sz="1575" b="0">
+                <a:solidFill>
+                  <a:srgbClr val="17253A"/>
                 </a:solidFill>
                 <a:latin typeface="Arial"/>
                 <a:ea typeface="Arial"/>
@@ -8825,15 +8833,161 @@
               </a:defRPr>
             </a:pPr>
             <a:r>
-              <a:rPr sz="1500" b="1">
+              <a:rPr sz="1575" b="0">
+                <a:solidFill>
+                  <a:srgbClr val="17253A"/>
+                </a:solidFill>
+                <a:latin typeface="Arial"/>
+                <a:ea typeface="Arial"/>
+                <a:cs typeface="Arial"/>
+              </a:rPr>
+              <a:t>Ten-thousands: 0 &lt; 6</a:t>
+            </a:r>
+          </a:p>
+        </p:txBody>
+      </p:sp>
+      <p:sp>
+        <p:nvSpPr>
+          <p:cNvPr id="23" name="">
+            <a:extLst xmlns:a="http://schemas.openxmlformats.org/drawingml/2006/main">
+              <a:ext uri="{FF2B5EF4-FFF2-40B4-BE49-F238E27FC236}">
+                <a16:creationId xmlns:a16="http://schemas.microsoft.com/office/drawing/2014/main" id="{B67B545D-170F-4B6C-966D-9284B0C8A9B6}"/>
+              </a:ext>
+            </a:extLst>
+          </p:cNvPr>
+          <p:cNvSpPr>
+            <a:spLocks xmlns:a="http://schemas.openxmlformats.org/drawingml/2006/main" noGrp="1"/>
+          </p:cNvSpPr>
+          <p:nvPr/>
+        </p:nvSpPr>
+        <p:spPr>
+          <a:xfrm xmlns:a="http://schemas.openxmlformats.org/drawingml/2006/main">
+            <a:off x="1714500" y="4886325"/>
+            <a:ext cx="9334500" cy="9525"/>
+          </a:xfrm>
+          <a:prstGeom xmlns:a="http://schemas.openxmlformats.org/drawingml/2006/main" prst="rect">
+            <a:avLst/>
+          </a:prstGeom>
+          <a:solidFill xmlns:a="http://schemas.openxmlformats.org/drawingml/2006/main">
+            <a:srgbClr val="D9E0E6"/>
+          </a:solidFill>
+          <a:ln xmlns:a="http://schemas.openxmlformats.org/drawingml/2006/main" w="0">
+            <a:solidFill>
+              <a:srgbClr val="D9E0E6"/>
+            </a:solidFill>
+          </a:ln>
+        </p:spPr>
+      </p:sp>
+      <p:sp>
+        <p:nvSpPr>
+          <p:cNvPr id="24" name="">
+            <a:extLst xmlns:a="http://schemas.openxmlformats.org/drawingml/2006/main">
+              <a:ext uri="{FF2B5EF4-FFF2-40B4-BE49-F238E27FC236}">
+                <a16:creationId xmlns:a16="http://schemas.microsoft.com/office/drawing/2014/main" id="{92851E95-66B6-4D0B-9F50-FFEBD80D7005}"/>
+              </a:ext>
+            </a:extLst>
+          </p:cNvPr>
+          <p:cNvSpPr>
+            <a:spLocks xmlns:a="http://schemas.openxmlformats.org/drawingml/2006/main" noGrp="1"/>
+          </p:cNvSpPr>
+          <p:nvPr/>
+        </p:nvSpPr>
+        <p:spPr>
+          <a:xfrm xmlns:a="http://schemas.openxmlformats.org/drawingml/2006/main">
+            <a:off x="1162050" y="5019675"/>
+            <a:ext cx="400050" cy="400050"/>
+          </a:xfrm>
+          <a:prstGeom xmlns:a="http://schemas.openxmlformats.org/drawingml/2006/main" prst="rect">
+            <a:avLst/>
+          </a:prstGeom>
+          <a:noFill xmlns:a="http://schemas.openxmlformats.org/drawingml/2006/main"/>
+          <a:ln xmlns:a="http://schemas.openxmlformats.org/drawingml/2006/main" w="0">
+            <a:noFill/>
+          </a:ln>
+        </p:spPr>
+        <p:txBody>
+          <a:bodyPr xmlns:a="http://schemas.openxmlformats.org/drawingml/2006/main" anchor="ctr">
+            <a:normAutofit fontScale="100000"/>
+          </a:bodyPr>
+          <a:lstStyle xmlns:a="http://schemas.openxmlformats.org/drawingml/2006/main"/>
+          <a:p xmlns:a="http://schemas.openxmlformats.org/drawingml/2006/main">
+            <a:pPr algn="ctr">
+              <a:defRPr sz="1125" b="1">
                 <a:solidFill>
                   <a:srgbClr val="2F785D"/>
                 </a:solidFill>
                 <a:latin typeface="Arial"/>
                 <a:ea typeface="Arial"/>
                 <a:cs typeface="Arial"/>
+              </a:defRPr>
+            </a:pPr>
+            <a:r>
+              <a:rPr sz="1125" b="1">
+                <a:solidFill>
+                  <a:srgbClr val="2F785D"/>
+                </a:solidFill>
+                <a:latin typeface="Arial"/>
+                <a:ea typeface="Arial"/>
+                <a:cs typeface="Arial"/>
               </a:rPr>
-              <a:t>Check the result: Check the value of every zero and compare from the greatest place.</a:t>
+              <a:t>5</a:t>
+            </a:r>
+          </a:p>
+        </p:txBody>
+      </p:sp>
+      <p:sp>
+        <p:nvSpPr>
+          <p:cNvPr id="25" name="">
+            <a:extLst xmlns:a="http://schemas.openxmlformats.org/drawingml/2006/main">
+              <a:ext uri="{FF2B5EF4-FFF2-40B4-BE49-F238E27FC236}">
+                <a16:creationId xmlns:a16="http://schemas.microsoft.com/office/drawing/2014/main" id="{32729399-3668-4C17-BE78-2D5047942195}"/>
+              </a:ext>
+            </a:extLst>
+          </p:cNvPr>
+          <p:cNvSpPr>
+            <a:spLocks xmlns:a="http://schemas.openxmlformats.org/drawingml/2006/main" noGrp="1"/>
+          </p:cNvSpPr>
+          <p:nvPr/>
+        </p:nvSpPr>
+        <p:spPr>
+          <a:xfrm xmlns:a="http://schemas.openxmlformats.org/drawingml/2006/main">
+            <a:off x="1714500" y="4933950"/>
+            <a:ext cx="9525000" cy="638175"/>
+          </a:xfrm>
+          <a:prstGeom xmlns:a="http://schemas.openxmlformats.org/drawingml/2006/main" prst="rect">
+            <a:avLst/>
+          </a:prstGeom>
+          <a:noFill xmlns:a="http://schemas.openxmlformats.org/drawingml/2006/main"/>
+          <a:ln xmlns:a="http://schemas.openxmlformats.org/drawingml/2006/main" w="0">
+            <a:noFill/>
+          </a:ln>
+        </p:spPr>
+        <p:txBody>
+          <a:bodyPr xmlns:a="http://schemas.openxmlformats.org/drawingml/2006/main" anchor="ctr">
+            <a:normAutofit fontScale="100000"/>
+          </a:bodyPr>
+          <a:lstStyle xmlns:a="http://schemas.openxmlformats.org/drawingml/2006/main"/>
+          <a:p xmlns:a="http://schemas.openxmlformats.org/drawingml/2006/main">
+            <a:pPr algn="l">
+              <a:defRPr sz="1575" b="1">
+                <a:solidFill>
+                  <a:srgbClr val="2F785D"/>
+                </a:solidFill>
+                <a:latin typeface="Arial"/>
+                <a:ea typeface="Arial"/>
+                <a:cs typeface="Arial"/>
+              </a:defRPr>
+            </a:pPr>
+            <a:r>
+              <a:rPr sz="1575" b="1">
+                <a:solidFill>
+                  <a:srgbClr val="2F785D"/>
+                </a:solidFill>
+                <a:latin typeface="Arial"/>
+                <a:ea typeface="Arial"/>
+                <a:cs typeface="Arial"/>
+              </a:rPr>
+              <a:t>5,906,120 &lt; 5,960,102</a:t>
             </a:r>
           </a:p>
         </p:txBody>
@@ -8841,7 +8995,7 @@
     </p:spTree>
     <p:extLst>
       <p:ext uri="{BB962C8B-B14F-4D97-AF65-F5344CB8AC3E}">
-        <p14:creationId xmlns:p14="http://schemas.microsoft.com/office/powerpoint/2010/main" val="633780307"/>
+        <p14:creationId xmlns:p14="http://schemas.microsoft.com/office/powerpoint/2010/main" val="1398497168"/>
       </p:ext>
     </p:extLst>
   </p:cSld>
@@ -9078,6 +9232,51 @@
                       </p:childTnLst>
                     </p:cTn>
                   </p:par>
+                  <p:par>
+                    <p:cTn id="23" fill="hold">
+                      <p:stCondLst>
+                        <p:cond delay="indefinite"/>
+                      </p:stCondLst>
+                      <p:childTnLst>
+                        <p:par>
+                          <p:cTn id="24" fill="hold">
+                            <p:stCondLst>
+                              <p:cond delay="0"/>
+                            </p:stCondLst>
+                            <p:childTnLst>
+                              <p:par>
+                                <p:cTn id="25" presetID="1" presetClass="entr" presetSubtype="0" fill="hold" grpId="0" nodeType="clickEffect">
+                                  <p:stCondLst>
+                                    <p:cond delay="0"/>
+                                  </p:stCondLst>
+                                  <p:childTnLst>
+                                    <p:set>
+                                      <p:cBhvr>
+                                        <p:cTn id="26" dur="1" fill="hold">
+                                          <p:stCondLst>
+                                            <p:cond delay="0"/>
+                                          </p:stCondLst>
+                                        </p:cTn>
+                                        <p:tgtEl>
+                                          <p:spTgt spid="25"/>
+                                        </p:tgtEl>
+                                        <p:attrNameLst>
+                                          <p:attrName>style.visibility</p:attrName>
+                                        </p:attrNameLst>
+                                      </p:cBhvr>
+                                      <p:to>
+                                        <p:strVal val="visible"/>
+                                      </p:to>
+                                    </p:set>
+                                  </p:childTnLst>
+                                </p:cTn>
+                              </p:par>
+                            </p:childTnLst>
+                          </p:cTn>
+                        </p:par>
+                      </p:childTnLst>
+                    </p:cTn>
+                  </p:par>
                 </p:childTnLst>
               </p:cTn>
               <p:prevCondLst>
@@ -9105,6 +9304,7 @@
       <p:bldP spid="16" grpId="0"/>
       <p:bldP spid="19" grpId="0"/>
       <p:bldP spid="22" grpId="0"/>
+      <p:bldP spid="25" grpId="0"/>
     </p:bldLst>
   </p:timing>
 </p:sld>
@@ -9134,7 +9334,7 @@
           <p:cNvPr id="15" name="">
             <a:extLst xmlns:a="http://schemas.openxmlformats.org/drawingml/2006/main">
               <a:ext uri="{FF2B5EF4-FFF2-40B4-BE49-F238E27FC236}">
-                <a16:creationId xmlns:a16="http://schemas.microsoft.com/office/drawing/2014/main" id="{0B94F603-E342-4E22-97AC-04AD8991CEEC}"/>
+                <a16:creationId xmlns:a16="http://schemas.microsoft.com/office/drawing/2014/main" id="{70E1CE3D-1C88-49FE-8E0B-9FCC169D092F}"/>
               </a:ext>
             </a:extLst>
           </p:cNvPr>
@@ -9166,7 +9366,7 @@
           <p:cNvPr id="2" name="">
             <a:extLst xmlns:a="http://schemas.openxmlformats.org/drawingml/2006/main">
               <a:ext uri="{FF2B5EF4-FFF2-40B4-BE49-F238E27FC236}">
-                <a16:creationId xmlns:a16="http://schemas.microsoft.com/office/drawing/2014/main" id="{265966DF-2795-4394-BA1E-749396FBAD11}"/>
+                <a16:creationId xmlns:a16="http://schemas.microsoft.com/office/drawing/2014/main" id="{72254744-3E3B-41E0-9339-8BF5C8246184}"/>
               </a:ext>
             </a:extLst>
           </p:cNvPr>
@@ -9223,7 +9423,7 @@
           <p:cNvPr id="3" name="">
             <a:extLst xmlns:a="http://schemas.openxmlformats.org/drawingml/2006/main">
               <a:ext uri="{FF2B5EF4-FFF2-40B4-BE49-F238E27FC236}">
-                <a16:creationId xmlns:a16="http://schemas.microsoft.com/office/drawing/2014/main" id="{99455844-0DBA-423A-B801-73139FA17140}"/>
+                <a16:creationId xmlns:a16="http://schemas.microsoft.com/office/drawing/2014/main" id="{FC44FC64-7FA8-4B9A-8F6B-A33C3DB5B418}"/>
               </a:ext>
             </a:extLst>
           </p:cNvPr>
@@ -9255,7 +9455,7 @@
           <p:cNvPr id="4" name="">
             <a:extLst xmlns:a="http://schemas.openxmlformats.org/drawingml/2006/main">
               <a:ext uri="{FF2B5EF4-FFF2-40B4-BE49-F238E27FC236}">
-                <a16:creationId xmlns:a16="http://schemas.microsoft.com/office/drawing/2014/main" id="{85F2FE96-2562-43FE-94FB-4B05CDD62078}"/>
+                <a16:creationId xmlns:a16="http://schemas.microsoft.com/office/drawing/2014/main" id="{E76AE4F8-6B71-43C5-9FFD-63B84F8D63B6}"/>
               </a:ext>
             </a:extLst>
           </p:cNvPr>
@@ -9312,7 +9512,7 @@
           <p:cNvPr id="5" name="">
             <a:extLst xmlns:a="http://schemas.openxmlformats.org/drawingml/2006/main">
               <a:ext uri="{FF2B5EF4-FFF2-40B4-BE49-F238E27FC236}">
-                <a16:creationId xmlns:a16="http://schemas.microsoft.com/office/drawing/2014/main" id="{3CE0FF9C-B287-421A-B0F4-05E8D059A89D}"/>
+                <a16:creationId xmlns:a16="http://schemas.microsoft.com/office/drawing/2014/main" id="{BDBE43AF-126D-42C4-8DA7-F7AC88E8CBAE}"/>
               </a:ext>
             </a:extLst>
           </p:cNvPr>
@@ -9369,7 +9569,7 @@
           <p:cNvPr id="6" name="">
             <a:extLst xmlns:a="http://schemas.openxmlformats.org/drawingml/2006/main">
               <a:ext uri="{FF2B5EF4-FFF2-40B4-BE49-F238E27FC236}">
-                <a16:creationId xmlns:a16="http://schemas.microsoft.com/office/drawing/2014/main" id="{E11E3363-6C1F-4C6B-A5D5-5FE177A0B2B1}"/>
+                <a16:creationId xmlns:a16="http://schemas.microsoft.com/office/drawing/2014/main" id="{FAAB79C3-85A5-4111-AEB5-AAFBC0BC3B02}"/>
               </a:ext>
             </a:extLst>
           </p:cNvPr>
@@ -9426,7 +9626,7 @@
           <p:cNvPr id="7" name="">
             <a:extLst xmlns:a="http://schemas.openxmlformats.org/drawingml/2006/main">
               <a:ext uri="{FF2B5EF4-FFF2-40B4-BE49-F238E27FC236}">
-                <a16:creationId xmlns:a16="http://schemas.microsoft.com/office/drawing/2014/main" id="{7D7454DB-E577-4FCA-811E-9622089BE4A6}"/>
+                <a16:creationId xmlns:a16="http://schemas.microsoft.com/office/drawing/2014/main" id="{68AC3BA1-8CDF-42DD-87E3-D949E995F4DB}"/>
               </a:ext>
             </a:extLst>
           </p:cNvPr>
@@ -9458,7 +9658,7 @@
           <p:cNvPr id="8" name="">
             <a:extLst xmlns:a="http://schemas.openxmlformats.org/drawingml/2006/main">
               <a:ext uri="{FF2B5EF4-FFF2-40B4-BE49-F238E27FC236}">
-                <a16:creationId xmlns:a16="http://schemas.microsoft.com/office/drawing/2014/main" id="{524A7E79-91B2-4A43-8989-DF01D8CFF529}"/>
+                <a16:creationId xmlns:a16="http://schemas.microsoft.com/office/drawing/2014/main" id="{5098F799-3D95-4C62-AA72-45EBC5928F99}"/>
               </a:ext>
             </a:extLst>
           </p:cNvPr>
@@ -9515,7 +9715,7 @@
           <p:cNvPr id="9" name="">
             <a:extLst xmlns:a="http://schemas.openxmlformats.org/drawingml/2006/main">
               <a:ext uri="{FF2B5EF4-FFF2-40B4-BE49-F238E27FC236}">
-                <a16:creationId xmlns:a16="http://schemas.microsoft.com/office/drawing/2014/main" id="{83A39E19-0A4B-4430-9BAC-0891906614DB}"/>
+                <a16:creationId xmlns:a16="http://schemas.microsoft.com/office/drawing/2014/main" id="{57FB06D5-0342-45DA-82E2-D290EEF21356}"/>
               </a:ext>
             </a:extLst>
           </p:cNvPr>
@@ -9572,7 +9772,7 @@
           <p:cNvPr id="10" name="">
             <a:extLst xmlns:a="http://schemas.openxmlformats.org/drawingml/2006/main">
               <a:ext uri="{FF2B5EF4-FFF2-40B4-BE49-F238E27FC236}">
-                <a16:creationId xmlns:a16="http://schemas.microsoft.com/office/drawing/2014/main" id="{02BD0147-8557-43B2-A6CD-1BF645F12B93}"/>
+                <a16:creationId xmlns:a16="http://schemas.microsoft.com/office/drawing/2014/main" id="{84974901-10B3-4512-BC60-402A4AE77ADD}"/>
               </a:ext>
             </a:extLst>
           </p:cNvPr>
@@ -9629,7 +9829,7 @@
           <p:cNvPr id="11" name="">
             <a:extLst xmlns:a="http://schemas.openxmlformats.org/drawingml/2006/main">
               <a:ext uri="{FF2B5EF4-FFF2-40B4-BE49-F238E27FC236}">
-                <a16:creationId xmlns:a16="http://schemas.microsoft.com/office/drawing/2014/main" id="{A9F83BE2-E400-4176-9B69-49DAB0C211C5}"/>
+                <a16:creationId xmlns:a16="http://schemas.microsoft.com/office/drawing/2014/main" id="{113BDA8D-8CE9-48BE-8CFC-E38B309A4395}"/>
               </a:ext>
             </a:extLst>
           </p:cNvPr>
@@ -9686,7 +9886,7 @@
           <p:cNvPr id="12" name="">
             <a:extLst xmlns:a="http://schemas.openxmlformats.org/drawingml/2006/main">
               <a:ext uri="{FF2B5EF4-FFF2-40B4-BE49-F238E27FC236}">
-                <a16:creationId xmlns:a16="http://schemas.microsoft.com/office/drawing/2014/main" id="{4CC509E6-06BF-42B8-9481-1F78701DBB78}"/>
+                <a16:creationId xmlns:a16="http://schemas.microsoft.com/office/drawing/2014/main" id="{4B3D5731-5C8B-4020-A09B-2A2F762037E4}"/>
               </a:ext>
             </a:extLst>
           </p:cNvPr>
@@ -9718,7 +9918,7 @@
           <p:cNvPr id="13" name="">
             <a:extLst xmlns:a="http://schemas.openxmlformats.org/drawingml/2006/main">
               <a:ext uri="{FF2B5EF4-FFF2-40B4-BE49-F238E27FC236}">
-                <a16:creationId xmlns:a16="http://schemas.microsoft.com/office/drawing/2014/main" id="{0C859FF0-8F87-42A0-A48E-2A6ACAC3F279}"/>
+                <a16:creationId xmlns:a16="http://schemas.microsoft.com/office/drawing/2014/main" id="{CD244E61-3126-4200-86B4-53C15F54C946}"/>
               </a:ext>
             </a:extLst>
           </p:cNvPr>
@@ -9775,7 +9975,7 @@
           <p:cNvPr id="14" name="">
             <a:extLst xmlns:a="http://schemas.openxmlformats.org/drawingml/2006/main">
               <a:ext uri="{FF2B5EF4-FFF2-40B4-BE49-F238E27FC236}">
-                <a16:creationId xmlns:a16="http://schemas.microsoft.com/office/drawing/2014/main" id="{95C0E649-6968-4578-B713-CED3573467E1}"/>
+                <a16:creationId xmlns:a16="http://schemas.microsoft.com/office/drawing/2014/main" id="{ECBE9823-04AB-4CBB-A3CE-2A453785479C}"/>
               </a:ext>
             </a:extLst>
           </p:cNvPr>
@@ -9830,7 +10030,7 @@
     </p:spTree>
     <p:extLst>
       <p:ext uri="{BB962C8B-B14F-4D97-AF65-F5344CB8AC3E}">
-        <p14:creationId xmlns:p14="http://schemas.microsoft.com/office/powerpoint/2010/main" val="1149185468"/>
+        <p14:creationId xmlns:p14="http://schemas.microsoft.com/office/powerpoint/2010/main" val="678259455"/>
       </p:ext>
     </p:extLst>
   </p:cSld>
@@ -10031,7 +10231,7 @@
           <p:cNvPr id="16" name="">
             <a:extLst xmlns:a="http://schemas.openxmlformats.org/drawingml/2006/main">
               <a:ext uri="{FF2B5EF4-FFF2-40B4-BE49-F238E27FC236}">
-                <a16:creationId xmlns:a16="http://schemas.microsoft.com/office/drawing/2014/main" id="{2EB819FE-76D5-4EBC-97D4-5B031FF6C23B}"/>
+                <a16:creationId xmlns:a16="http://schemas.microsoft.com/office/drawing/2014/main" id="{60F33172-95D6-49D3-B383-FCA2E1F49D2E}"/>
               </a:ext>
             </a:extLst>
           </p:cNvPr>
@@ -10063,7 +10263,7 @@
           <p:cNvPr id="2" name="">
             <a:extLst xmlns:a="http://schemas.openxmlformats.org/drawingml/2006/main">
               <a:ext uri="{FF2B5EF4-FFF2-40B4-BE49-F238E27FC236}">
-                <a16:creationId xmlns:a16="http://schemas.microsoft.com/office/drawing/2014/main" id="{A11AEC47-6E00-4FE7-B5A7-1252219DD191}"/>
+                <a16:creationId xmlns:a16="http://schemas.microsoft.com/office/drawing/2014/main" id="{A2A98FDB-882B-4B11-B677-040BAB41A405}"/>
               </a:ext>
             </a:extLst>
           </p:cNvPr>
@@ -10120,7 +10320,7 @@
           <p:cNvPr id="3" name="">
             <a:extLst xmlns:a="http://schemas.openxmlformats.org/drawingml/2006/main">
               <a:ext uri="{FF2B5EF4-FFF2-40B4-BE49-F238E27FC236}">
-                <a16:creationId xmlns:a16="http://schemas.microsoft.com/office/drawing/2014/main" id="{5FDDCA99-D03A-4181-8541-CB6571C7F242}"/>
+                <a16:creationId xmlns:a16="http://schemas.microsoft.com/office/drawing/2014/main" id="{AD5594B0-4BF3-4356-A5A2-3814B37B6743}"/>
               </a:ext>
             </a:extLst>
           </p:cNvPr>
@@ -10152,7 +10352,7 @@
           <p:cNvPr id="4" name="">
             <a:extLst xmlns:a="http://schemas.openxmlformats.org/drawingml/2006/main">
               <a:ext uri="{FF2B5EF4-FFF2-40B4-BE49-F238E27FC236}">
-                <a16:creationId xmlns:a16="http://schemas.microsoft.com/office/drawing/2014/main" id="{9667C555-E5EC-41CF-B6C9-BD84FD089E42}"/>
+                <a16:creationId xmlns:a16="http://schemas.microsoft.com/office/drawing/2014/main" id="{973A384D-367F-479B-8F8C-E85E87F9064A}"/>
               </a:ext>
             </a:extLst>
           </p:cNvPr>
@@ -10209,7 +10409,7 @@
           <p:cNvPr id="5" name="">
             <a:extLst xmlns:a="http://schemas.openxmlformats.org/drawingml/2006/main">
               <a:ext uri="{FF2B5EF4-FFF2-40B4-BE49-F238E27FC236}">
-                <a16:creationId xmlns:a16="http://schemas.microsoft.com/office/drawing/2014/main" id="{30E7B430-29E4-46C5-997F-1754A5F89CA0}"/>
+                <a16:creationId xmlns:a16="http://schemas.microsoft.com/office/drawing/2014/main" id="{9ABD8D9F-500D-4B00-8B14-3C2B67B8C5C9}"/>
               </a:ext>
             </a:extLst>
           </p:cNvPr>
@@ -10266,7 +10466,7 @@
           <p:cNvPr id="6" name="">
             <a:extLst xmlns:a="http://schemas.openxmlformats.org/drawingml/2006/main">
               <a:ext uri="{FF2B5EF4-FFF2-40B4-BE49-F238E27FC236}">
-                <a16:creationId xmlns:a16="http://schemas.microsoft.com/office/drawing/2014/main" id="{7CF286C1-1EAA-4361-B014-7AF4F354AAA9}"/>
+                <a16:creationId xmlns:a16="http://schemas.microsoft.com/office/drawing/2014/main" id="{A4413FD8-9E0D-422F-83B2-3379DF8C0C59}"/>
               </a:ext>
             </a:extLst>
           </p:cNvPr>
@@ -10323,7 +10523,7 @@
           <p:cNvPr id="7" name="">
             <a:extLst xmlns:a="http://schemas.openxmlformats.org/drawingml/2006/main">
               <a:ext uri="{FF2B5EF4-FFF2-40B4-BE49-F238E27FC236}">
-                <a16:creationId xmlns:a16="http://schemas.microsoft.com/office/drawing/2014/main" id="{853AC775-C6DC-41BF-8247-B70637F75058}"/>
+                <a16:creationId xmlns:a16="http://schemas.microsoft.com/office/drawing/2014/main" id="{317648B6-8B5B-4583-BD39-83E82372B115}"/>
               </a:ext>
             </a:extLst>
           </p:cNvPr>
@@ -10355,7 +10555,7 @@
           <p:cNvPr id="8" name="">
             <a:extLst xmlns:a="http://schemas.openxmlformats.org/drawingml/2006/main">
               <a:ext uri="{FF2B5EF4-FFF2-40B4-BE49-F238E27FC236}">
-                <a16:creationId xmlns:a16="http://schemas.microsoft.com/office/drawing/2014/main" id="{FAB5B2BE-6672-4903-BF8C-C6EAD917EE53}"/>
+                <a16:creationId xmlns:a16="http://schemas.microsoft.com/office/drawing/2014/main" id="{9CF14DC5-D996-4856-82EB-B83679613F6F}"/>
               </a:ext>
             </a:extLst>
           </p:cNvPr>
@@ -10412,7 +10612,7 @@
           <p:cNvPr id="9" name="">
             <a:extLst xmlns:a="http://schemas.openxmlformats.org/drawingml/2006/main">
               <a:ext uri="{FF2B5EF4-FFF2-40B4-BE49-F238E27FC236}">
-                <a16:creationId xmlns:a16="http://schemas.microsoft.com/office/drawing/2014/main" id="{8C62827A-4A4A-416B-BFDC-B8462CB9A983}"/>
+                <a16:creationId xmlns:a16="http://schemas.microsoft.com/office/drawing/2014/main" id="{332200A2-4FAB-4AD2-AA31-7A556FE85609}"/>
               </a:ext>
             </a:extLst>
           </p:cNvPr>
@@ -10469,7 +10669,7 @@
           <p:cNvPr id="10" name="">
             <a:extLst xmlns:a="http://schemas.openxmlformats.org/drawingml/2006/main">
               <a:ext uri="{FF2B5EF4-FFF2-40B4-BE49-F238E27FC236}">
-                <a16:creationId xmlns:a16="http://schemas.microsoft.com/office/drawing/2014/main" id="{A3C70F46-9815-4EAD-9ED1-DF8E4357D960}"/>
+                <a16:creationId xmlns:a16="http://schemas.microsoft.com/office/drawing/2014/main" id="{8ED9A2A9-26E1-482A-9E5D-A5EE1E7EA4A6}"/>
               </a:ext>
             </a:extLst>
           </p:cNvPr>
@@ -10526,7 +10726,7 @@
           <p:cNvPr id="11" name="">
             <a:extLst xmlns:a="http://schemas.openxmlformats.org/drawingml/2006/main">
               <a:ext uri="{FF2B5EF4-FFF2-40B4-BE49-F238E27FC236}">
-                <a16:creationId xmlns:a16="http://schemas.microsoft.com/office/drawing/2014/main" id="{62124385-6067-44EE-B607-411AA8C478A6}"/>
+                <a16:creationId xmlns:a16="http://schemas.microsoft.com/office/drawing/2014/main" id="{0A096015-07C1-406D-AD0D-D4884FE58623}"/>
               </a:ext>
             </a:extLst>
           </p:cNvPr>
@@ -10583,7 +10783,7 @@
           <p:cNvPr id="12" name="">
             <a:extLst xmlns:a="http://schemas.openxmlformats.org/drawingml/2006/main">
               <a:ext uri="{FF2B5EF4-FFF2-40B4-BE49-F238E27FC236}">
-                <a16:creationId xmlns:a16="http://schemas.microsoft.com/office/drawing/2014/main" id="{56257F49-797C-4235-8800-6E4288580DF7}"/>
+                <a16:creationId xmlns:a16="http://schemas.microsoft.com/office/drawing/2014/main" id="{504F89A3-7559-4F5F-9545-A23AA9B0D3C5}"/>
               </a:ext>
             </a:extLst>
           </p:cNvPr>
@@ -10640,7 +10840,7 @@
           <p:cNvPr id="13" name="">
             <a:extLst xmlns:a="http://schemas.openxmlformats.org/drawingml/2006/main">
               <a:ext uri="{FF2B5EF4-FFF2-40B4-BE49-F238E27FC236}">
-                <a16:creationId xmlns:a16="http://schemas.microsoft.com/office/drawing/2014/main" id="{FCCADFB2-DAF7-45A2-98FD-14022C030138}"/>
+                <a16:creationId xmlns:a16="http://schemas.microsoft.com/office/drawing/2014/main" id="{B536413D-238C-416D-B3ED-2101615346FA}"/>
               </a:ext>
             </a:extLst>
           </p:cNvPr>
@@ -10697,7 +10897,7 @@
           <p:cNvPr id="14" name="">
             <a:extLst xmlns:a="http://schemas.openxmlformats.org/drawingml/2006/main">
               <a:ext uri="{FF2B5EF4-FFF2-40B4-BE49-F238E27FC236}">
-                <a16:creationId xmlns:a16="http://schemas.microsoft.com/office/drawing/2014/main" id="{607C91E7-C7CC-48CB-8D4C-0122ADB9E21C}"/>
+                <a16:creationId xmlns:a16="http://schemas.microsoft.com/office/drawing/2014/main" id="{520FD9D9-C6D2-42F9-8C5A-86A74BC07104}"/>
               </a:ext>
             </a:extLst>
           </p:cNvPr>
@@ -10754,7 +10954,7 @@
           <p:cNvPr id="15" name="">
             <a:extLst xmlns:a="http://schemas.openxmlformats.org/drawingml/2006/main">
               <a:ext uri="{FF2B5EF4-FFF2-40B4-BE49-F238E27FC236}">
-                <a16:creationId xmlns:a16="http://schemas.microsoft.com/office/drawing/2014/main" id="{C09C8CAF-9DFE-4A5D-858F-20CEA3AA4F40}"/>
+                <a16:creationId xmlns:a16="http://schemas.microsoft.com/office/drawing/2014/main" id="{105B54DB-C140-438A-8A28-BC2F550A3B3B}"/>
               </a:ext>
             </a:extLst>
           </p:cNvPr>
@@ -10809,7 +11009,7 @@
     </p:spTree>
     <p:extLst>
       <p:ext uri="{BB962C8B-B14F-4D97-AF65-F5344CB8AC3E}">
-        <p14:creationId xmlns:p14="http://schemas.microsoft.com/office/powerpoint/2010/main" val="1506578288"/>
+        <p14:creationId xmlns:p14="http://schemas.microsoft.com/office/powerpoint/2010/main" val="569104821"/>
       </p:ext>
     </p:extLst>
   </p:cSld>
@@ -10964,7 +11164,7 @@
           <p:cNvPr id="16" name="">
             <a:extLst xmlns:a="http://schemas.openxmlformats.org/drawingml/2006/main">
               <a:ext uri="{FF2B5EF4-FFF2-40B4-BE49-F238E27FC236}">
-                <a16:creationId xmlns:a16="http://schemas.microsoft.com/office/drawing/2014/main" id="{E618561E-8F13-46E4-B99C-9AF21FB42347}"/>
+                <a16:creationId xmlns:a16="http://schemas.microsoft.com/office/drawing/2014/main" id="{5B483EDB-A6BC-4F85-B40A-4A92EC1A1738}"/>
               </a:ext>
             </a:extLst>
           </p:cNvPr>
@@ -10996,7 +11196,7 @@
           <p:cNvPr id="2" name="">
             <a:extLst xmlns:a="http://schemas.openxmlformats.org/drawingml/2006/main">
               <a:ext uri="{FF2B5EF4-FFF2-40B4-BE49-F238E27FC236}">
-                <a16:creationId xmlns:a16="http://schemas.microsoft.com/office/drawing/2014/main" id="{5751C3E5-3850-461D-B6A1-245D5E861363}"/>
+                <a16:creationId xmlns:a16="http://schemas.microsoft.com/office/drawing/2014/main" id="{5853244F-2404-4064-BF5F-F64714CAD8F2}"/>
               </a:ext>
             </a:extLst>
           </p:cNvPr>
@@ -11053,7 +11253,7 @@
           <p:cNvPr id="3" name="">
             <a:extLst xmlns:a="http://schemas.openxmlformats.org/drawingml/2006/main">
               <a:ext uri="{FF2B5EF4-FFF2-40B4-BE49-F238E27FC236}">
-                <a16:creationId xmlns:a16="http://schemas.microsoft.com/office/drawing/2014/main" id="{951C0E93-782D-4D45-9768-0D8AFECA5A8E}"/>
+                <a16:creationId xmlns:a16="http://schemas.microsoft.com/office/drawing/2014/main" id="{FD019BC5-460D-4435-9FDE-85D4FE3D8409}"/>
               </a:ext>
             </a:extLst>
           </p:cNvPr>
@@ -11085,7 +11285,7 @@
           <p:cNvPr id="4" name="">
             <a:extLst xmlns:a="http://schemas.openxmlformats.org/drawingml/2006/main">
               <a:ext uri="{FF2B5EF4-FFF2-40B4-BE49-F238E27FC236}">
-                <a16:creationId xmlns:a16="http://schemas.microsoft.com/office/drawing/2014/main" id="{7BBD4698-C58F-492D-9C8E-32112DC6E3E7}"/>
+                <a16:creationId xmlns:a16="http://schemas.microsoft.com/office/drawing/2014/main" id="{7167ABE8-82DB-46ED-BC9F-3570AB4FED3B}"/>
               </a:ext>
             </a:extLst>
           </p:cNvPr>
@@ -11142,7 +11342,7 @@
           <p:cNvPr id="5" name="">
             <a:extLst xmlns:a="http://schemas.openxmlformats.org/drawingml/2006/main">
               <a:ext uri="{FF2B5EF4-FFF2-40B4-BE49-F238E27FC236}">
-                <a16:creationId xmlns:a16="http://schemas.microsoft.com/office/drawing/2014/main" id="{084133F3-389D-444F-88AA-BDD4C72D0443}"/>
+                <a16:creationId xmlns:a16="http://schemas.microsoft.com/office/drawing/2014/main" id="{9CA1B361-BC41-43D1-94D8-15A6DD432081}"/>
               </a:ext>
             </a:extLst>
           </p:cNvPr>
@@ -11199,7 +11399,7 @@
           <p:cNvPr id="6" name="">
             <a:extLst xmlns:a="http://schemas.openxmlformats.org/drawingml/2006/main">
               <a:ext uri="{FF2B5EF4-FFF2-40B4-BE49-F238E27FC236}">
-                <a16:creationId xmlns:a16="http://schemas.microsoft.com/office/drawing/2014/main" id="{B7FADB6D-8D74-4B55-8AC4-04E030AD4923}"/>
+                <a16:creationId xmlns:a16="http://schemas.microsoft.com/office/drawing/2014/main" id="{F3975981-CBBB-45B4-A303-8B94855340A9}"/>
               </a:ext>
             </a:extLst>
           </p:cNvPr>
@@ -11256,7 +11456,7 @@
           <p:cNvPr id="7" name="">
             <a:extLst xmlns:a="http://schemas.openxmlformats.org/drawingml/2006/main">
               <a:ext uri="{FF2B5EF4-FFF2-40B4-BE49-F238E27FC236}">
-                <a16:creationId xmlns:a16="http://schemas.microsoft.com/office/drawing/2014/main" id="{45917CF0-019E-4776-9024-5FB10E1B215F}"/>
+                <a16:creationId xmlns:a16="http://schemas.microsoft.com/office/drawing/2014/main" id="{6B7EE52D-0E54-4920-84DB-EB09DC3EF98E}"/>
               </a:ext>
             </a:extLst>
           </p:cNvPr>
@@ -11288,7 +11488,7 @@
           <p:cNvPr id="8" name="">
             <a:extLst xmlns:a="http://schemas.openxmlformats.org/drawingml/2006/main">
               <a:ext uri="{FF2B5EF4-FFF2-40B4-BE49-F238E27FC236}">
-                <a16:creationId xmlns:a16="http://schemas.microsoft.com/office/drawing/2014/main" id="{784B5028-CC05-4C86-9A2B-32272536AE88}"/>
+                <a16:creationId xmlns:a16="http://schemas.microsoft.com/office/drawing/2014/main" id="{B5D87C4A-7E5B-4E11-99B4-C182CC17A45D}"/>
               </a:ext>
             </a:extLst>
           </p:cNvPr>
@@ -11345,7 +11545,7 @@
           <p:cNvPr id="9" name="">
             <a:extLst xmlns:a="http://schemas.openxmlformats.org/drawingml/2006/main">
               <a:ext uri="{FF2B5EF4-FFF2-40B4-BE49-F238E27FC236}">
-                <a16:creationId xmlns:a16="http://schemas.microsoft.com/office/drawing/2014/main" id="{72247081-00C1-4430-90EE-0D5F023741BF}"/>
+                <a16:creationId xmlns:a16="http://schemas.microsoft.com/office/drawing/2014/main" id="{6FFBFE1E-0463-49AE-B57A-DF267555A82E}"/>
               </a:ext>
             </a:extLst>
           </p:cNvPr>
@@ -11406,7 +11606,7 @@
           <p:nvPr/>
         </p:nvPicPr>
         <p:blipFill>
-          <a:blip xmlns:r="http://schemas.openxmlformats.org/officeDocument/2006/relationships" xmlns:a="http://schemas.openxmlformats.org/drawingml/2006/main" r:embed="Rb6991d1c401349cb"/>
+          <a:blip xmlns:r="http://schemas.openxmlformats.org/officeDocument/2006/relationships" xmlns:a="http://schemas.openxmlformats.org/drawingml/2006/main" r:embed="Rcf84faf744064855"/>
           <a:stretch xmlns:a="http://schemas.openxmlformats.org/drawingml/2006/main"/>
         </p:blipFill>
         <p:spPr>
@@ -11424,7 +11624,7 @@
           <p:cNvPr id="11" name="">
             <a:extLst xmlns:a="http://schemas.openxmlformats.org/drawingml/2006/main">
               <a:ext uri="{FF2B5EF4-FFF2-40B4-BE49-F238E27FC236}">
-                <a16:creationId xmlns:a16="http://schemas.microsoft.com/office/drawing/2014/main" id="{0F0D675E-5151-4E05-B659-BE76C4ED3DD0}"/>
+                <a16:creationId xmlns:a16="http://schemas.microsoft.com/office/drawing/2014/main" id="{C1F9D001-69C7-4495-B9A6-D2A2FE0C7DAC}"/>
               </a:ext>
             </a:extLst>
           </p:cNvPr>
@@ -11481,7 +11681,7 @@
           <p:cNvPr id="12" name="">
             <a:extLst xmlns:a="http://schemas.openxmlformats.org/drawingml/2006/main">
               <a:ext uri="{FF2B5EF4-FFF2-40B4-BE49-F238E27FC236}">
-                <a16:creationId xmlns:a16="http://schemas.microsoft.com/office/drawing/2014/main" id="{C4092AC1-7EA2-4EDD-9686-98425D700342}"/>
+                <a16:creationId xmlns:a16="http://schemas.microsoft.com/office/drawing/2014/main" id="{89176D5C-4859-498E-8E4C-F464AF51091C}"/>
               </a:ext>
             </a:extLst>
           </p:cNvPr>
@@ -11538,7 +11738,7 @@
           <p:cNvPr id="13" name="">
             <a:extLst xmlns:a="http://schemas.openxmlformats.org/drawingml/2006/main">
               <a:ext uri="{FF2B5EF4-FFF2-40B4-BE49-F238E27FC236}">
-                <a16:creationId xmlns:a16="http://schemas.microsoft.com/office/drawing/2014/main" id="{B9F6B33E-266C-4602-9570-AA990DF2A18C}"/>
+                <a16:creationId xmlns:a16="http://schemas.microsoft.com/office/drawing/2014/main" id="{F92B61F4-9294-42DC-A232-3E87B96A1E0C}"/>
               </a:ext>
             </a:extLst>
           </p:cNvPr>
@@ -11570,7 +11770,7 @@
           <p:cNvPr id="14" name="">
             <a:extLst xmlns:a="http://schemas.openxmlformats.org/drawingml/2006/main">
               <a:ext uri="{FF2B5EF4-FFF2-40B4-BE49-F238E27FC236}">
-                <a16:creationId xmlns:a16="http://schemas.microsoft.com/office/drawing/2014/main" id="{8FD3379D-93D4-4DAC-82E2-C413291BB993}"/>
+                <a16:creationId xmlns:a16="http://schemas.microsoft.com/office/drawing/2014/main" id="{E876D2A7-8A76-496B-878B-B61FBA6CE2F5}"/>
               </a:ext>
             </a:extLst>
           </p:cNvPr>
@@ -11627,7 +11827,7 @@
           <p:cNvPr id="15" name="">
             <a:extLst xmlns:a="http://schemas.openxmlformats.org/drawingml/2006/main">
               <a:ext uri="{FF2B5EF4-FFF2-40B4-BE49-F238E27FC236}">
-                <a16:creationId xmlns:a16="http://schemas.microsoft.com/office/drawing/2014/main" id="{985FCBDD-E446-4F36-BE32-93F9587C8609}"/>
+                <a16:creationId xmlns:a16="http://schemas.microsoft.com/office/drawing/2014/main" id="{FBCAB561-6611-47B1-BE3A-4CAF5E29A97E}"/>
               </a:ext>
             </a:extLst>
           </p:cNvPr>
@@ -11682,7 +11882,7 @@
     </p:spTree>
     <p:extLst>
       <p:ext uri="{BB962C8B-B14F-4D97-AF65-F5344CB8AC3E}">
-        <p14:creationId xmlns:p14="http://schemas.microsoft.com/office/powerpoint/2010/main" val="934170707"/>
+        <p14:creationId xmlns:p14="http://schemas.microsoft.com/office/powerpoint/2010/main" val="1839568071"/>
       </p:ext>
     </p:extLst>
   </p:cSld>
@@ -11837,7 +12037,7 @@
           <p:cNvPr id="23" name="">
             <a:extLst xmlns:a="http://schemas.openxmlformats.org/drawingml/2006/main">
               <a:ext uri="{FF2B5EF4-FFF2-40B4-BE49-F238E27FC236}">
-                <a16:creationId xmlns:a16="http://schemas.microsoft.com/office/drawing/2014/main" id="{40A5C477-1E59-412F-9314-9B7B29A375A9}"/>
+                <a16:creationId xmlns:a16="http://schemas.microsoft.com/office/drawing/2014/main" id="{476A65D4-8CDC-471E-B949-0BBCA2843A59}"/>
               </a:ext>
             </a:extLst>
           </p:cNvPr>
@@ -11869,7 +12069,7 @@
           <p:cNvPr id="2" name="">
             <a:extLst xmlns:a="http://schemas.openxmlformats.org/drawingml/2006/main">
               <a:ext uri="{FF2B5EF4-FFF2-40B4-BE49-F238E27FC236}">
-                <a16:creationId xmlns:a16="http://schemas.microsoft.com/office/drawing/2014/main" id="{5ADF1DE3-0934-4B7D-8A03-6DFCC763F949}"/>
+                <a16:creationId xmlns:a16="http://schemas.microsoft.com/office/drawing/2014/main" id="{CDB0F392-0DDA-4C2B-84F7-9DA998316198}"/>
               </a:ext>
             </a:extLst>
           </p:cNvPr>
@@ -11926,7 +12126,7 @@
           <p:cNvPr id="3" name="">
             <a:extLst xmlns:a="http://schemas.openxmlformats.org/drawingml/2006/main">
               <a:ext uri="{FF2B5EF4-FFF2-40B4-BE49-F238E27FC236}">
-                <a16:creationId xmlns:a16="http://schemas.microsoft.com/office/drawing/2014/main" id="{5316AD55-97C5-43CB-9634-D54BACA956E2}"/>
+                <a16:creationId xmlns:a16="http://schemas.microsoft.com/office/drawing/2014/main" id="{2FB29740-9387-49CE-8E63-36A64E97F8D9}"/>
               </a:ext>
             </a:extLst>
           </p:cNvPr>
@@ -11958,7 +12158,7 @@
           <p:cNvPr id="4" name="">
             <a:extLst xmlns:a="http://schemas.openxmlformats.org/drawingml/2006/main">
               <a:ext uri="{FF2B5EF4-FFF2-40B4-BE49-F238E27FC236}">
-                <a16:creationId xmlns:a16="http://schemas.microsoft.com/office/drawing/2014/main" id="{99246535-1B42-46FF-887B-4ECA65B709D5}"/>
+                <a16:creationId xmlns:a16="http://schemas.microsoft.com/office/drawing/2014/main" id="{3A75F508-CA4C-4F77-851C-9FFA497EE3E6}"/>
               </a:ext>
             </a:extLst>
           </p:cNvPr>
@@ -12015,7 +12215,7 @@
           <p:cNvPr id="5" name="">
             <a:extLst xmlns:a="http://schemas.openxmlformats.org/drawingml/2006/main">
               <a:ext uri="{FF2B5EF4-FFF2-40B4-BE49-F238E27FC236}">
-                <a16:creationId xmlns:a16="http://schemas.microsoft.com/office/drawing/2014/main" id="{200CCD93-03E8-4B36-8AE8-C10A286FC000}"/>
+                <a16:creationId xmlns:a16="http://schemas.microsoft.com/office/drawing/2014/main" id="{02E5A879-B581-4496-9C31-CEE8122096BD}"/>
               </a:ext>
             </a:extLst>
           </p:cNvPr>
@@ -12072,7 +12272,7 @@
           <p:cNvPr id="6" name="">
             <a:extLst xmlns:a="http://schemas.openxmlformats.org/drawingml/2006/main">
               <a:ext uri="{FF2B5EF4-FFF2-40B4-BE49-F238E27FC236}">
-                <a16:creationId xmlns:a16="http://schemas.microsoft.com/office/drawing/2014/main" id="{83523C90-84E5-414D-8059-6BA66045EC51}"/>
+                <a16:creationId xmlns:a16="http://schemas.microsoft.com/office/drawing/2014/main" id="{C18BB3B2-0F83-4FC5-9B6F-7D3C7905163D}"/>
               </a:ext>
             </a:extLst>
           </p:cNvPr>
@@ -12129,7 +12329,7 @@
           <p:cNvPr id="7" name="">
             <a:extLst xmlns:a="http://schemas.openxmlformats.org/drawingml/2006/main">
               <a:ext uri="{FF2B5EF4-FFF2-40B4-BE49-F238E27FC236}">
-                <a16:creationId xmlns:a16="http://schemas.microsoft.com/office/drawing/2014/main" id="{B27A6679-8274-4138-A048-2D5C8892656C}"/>
+                <a16:creationId xmlns:a16="http://schemas.microsoft.com/office/drawing/2014/main" id="{7465BA26-C3D7-4553-99AD-C28418405E62}"/>
               </a:ext>
             </a:extLst>
           </p:cNvPr>
@@ -12161,7 +12361,7 @@
           <p:cNvPr id="8" name="">
             <a:extLst xmlns:a="http://schemas.openxmlformats.org/drawingml/2006/main">
               <a:ext uri="{FF2B5EF4-FFF2-40B4-BE49-F238E27FC236}">
-                <a16:creationId xmlns:a16="http://schemas.microsoft.com/office/drawing/2014/main" id="{F8873E5D-5914-40AB-BE57-7146DFBD53B7}"/>
+                <a16:creationId xmlns:a16="http://schemas.microsoft.com/office/drawing/2014/main" id="{5D270C78-EEBD-4BAC-A185-DF5D4938B4E3}"/>
               </a:ext>
             </a:extLst>
           </p:cNvPr>
@@ -12218,7 +12418,7 @@
           <p:cNvPr id="9" name="">
             <a:extLst xmlns:a="http://schemas.openxmlformats.org/drawingml/2006/main">
               <a:ext uri="{FF2B5EF4-FFF2-40B4-BE49-F238E27FC236}">
-                <a16:creationId xmlns:a16="http://schemas.microsoft.com/office/drawing/2014/main" id="{540FEDDC-66E4-4B25-8E74-CB069DDF7722}"/>
+                <a16:creationId xmlns:a16="http://schemas.microsoft.com/office/drawing/2014/main" id="{37FADB0B-85AA-40AD-9146-F21A25396A8D}"/>
               </a:ext>
             </a:extLst>
           </p:cNvPr>
@@ -12275,7 +12475,7 @@
           <p:cNvPr id="10" name="">
             <a:extLst xmlns:a="http://schemas.openxmlformats.org/drawingml/2006/main">
               <a:ext uri="{FF2B5EF4-FFF2-40B4-BE49-F238E27FC236}">
-                <a16:creationId xmlns:a16="http://schemas.microsoft.com/office/drawing/2014/main" id="{6B1616CC-3069-4D2D-A9EE-831F7D174359}"/>
+                <a16:creationId xmlns:a16="http://schemas.microsoft.com/office/drawing/2014/main" id="{7013151A-DD20-499D-A9A8-3D7C4F8A5262}"/>
               </a:ext>
             </a:extLst>
           </p:cNvPr>
@@ -12309,7 +12509,7 @@
           <p:cNvPr id="11" name="">
             <a:extLst xmlns:a="http://schemas.openxmlformats.org/drawingml/2006/main">
               <a:ext uri="{FF2B5EF4-FFF2-40B4-BE49-F238E27FC236}">
-                <a16:creationId xmlns:a16="http://schemas.microsoft.com/office/drawing/2014/main" id="{9AF13E96-F7FC-4D4E-85B7-A8D6A5574B96}"/>
+                <a16:creationId xmlns:a16="http://schemas.microsoft.com/office/drawing/2014/main" id="{37685D81-9115-42DB-A343-9195B8B75A66}"/>
               </a:ext>
             </a:extLst>
           </p:cNvPr>
@@ -12341,7 +12541,7 @@
           <p:cNvPr id="12" name="">
             <a:extLst xmlns:a="http://schemas.openxmlformats.org/drawingml/2006/main">
               <a:ext uri="{FF2B5EF4-FFF2-40B4-BE49-F238E27FC236}">
-                <a16:creationId xmlns:a16="http://schemas.microsoft.com/office/drawing/2014/main" id="{31768FB0-BA5C-4E3A-ADC9-930490094451}"/>
+                <a16:creationId xmlns:a16="http://schemas.microsoft.com/office/drawing/2014/main" id="{CE3006A0-8E9E-45CF-A490-F092FF463689}"/>
               </a:ext>
             </a:extLst>
           </p:cNvPr>
@@ -12398,7 +12598,7 @@
           <p:cNvPr id="13" name="">
             <a:extLst xmlns:a="http://schemas.openxmlformats.org/drawingml/2006/main">
               <a:ext uri="{FF2B5EF4-FFF2-40B4-BE49-F238E27FC236}">
-                <a16:creationId xmlns:a16="http://schemas.microsoft.com/office/drawing/2014/main" id="{ECB55C18-D378-48E5-BC6D-BF3BB7C57C9F}"/>
+                <a16:creationId xmlns:a16="http://schemas.microsoft.com/office/drawing/2014/main" id="{A5DDFD75-EAA8-40FB-9EE7-9E6D904C9AD4}"/>
               </a:ext>
             </a:extLst>
           </p:cNvPr>
@@ -12455,7 +12655,7 @@
           <p:cNvPr id="14" name="">
             <a:extLst xmlns:a="http://schemas.openxmlformats.org/drawingml/2006/main">
               <a:ext uri="{FF2B5EF4-FFF2-40B4-BE49-F238E27FC236}">
-                <a16:creationId xmlns:a16="http://schemas.microsoft.com/office/drawing/2014/main" id="{539BF607-D31B-46A1-A469-A1E56BF2A85A}"/>
+                <a16:creationId xmlns:a16="http://schemas.microsoft.com/office/drawing/2014/main" id="{B3E7338D-E0BB-4782-AA74-93437C11D92F}"/>
               </a:ext>
             </a:extLst>
           </p:cNvPr>
@@ -12489,7 +12689,7 @@
           <p:cNvPr id="15" name="">
             <a:extLst xmlns:a="http://schemas.openxmlformats.org/drawingml/2006/main">
               <a:ext uri="{FF2B5EF4-FFF2-40B4-BE49-F238E27FC236}">
-                <a16:creationId xmlns:a16="http://schemas.microsoft.com/office/drawing/2014/main" id="{24FC23EE-20E0-465A-9839-78DF5D686490}"/>
+                <a16:creationId xmlns:a16="http://schemas.microsoft.com/office/drawing/2014/main" id="{458EA226-38CD-48B4-B1FB-7DC45871A78F}"/>
               </a:ext>
             </a:extLst>
           </p:cNvPr>
@@ -12521,7 +12721,7 @@
           <p:cNvPr id="16" name="">
             <a:extLst xmlns:a="http://schemas.openxmlformats.org/drawingml/2006/main">
               <a:ext uri="{FF2B5EF4-FFF2-40B4-BE49-F238E27FC236}">
-                <a16:creationId xmlns:a16="http://schemas.microsoft.com/office/drawing/2014/main" id="{D872BBCC-4F58-4C6C-A27C-7E3EB176DD3A}"/>
+                <a16:creationId xmlns:a16="http://schemas.microsoft.com/office/drawing/2014/main" id="{95C67A5E-0336-44EE-9BBC-D7138C1C35D2}"/>
               </a:ext>
             </a:extLst>
           </p:cNvPr>
@@ -12578,7 +12778,7 @@
           <p:cNvPr id="17" name="">
             <a:extLst xmlns:a="http://schemas.openxmlformats.org/drawingml/2006/main">
               <a:ext uri="{FF2B5EF4-FFF2-40B4-BE49-F238E27FC236}">
-                <a16:creationId xmlns:a16="http://schemas.microsoft.com/office/drawing/2014/main" id="{91B54D03-524E-4F6B-B7C1-F3EA82E90FA5}"/>
+                <a16:creationId xmlns:a16="http://schemas.microsoft.com/office/drawing/2014/main" id="{49164C9E-6D0A-4E21-9850-4802B7CB22E0}"/>
               </a:ext>
             </a:extLst>
           </p:cNvPr>
@@ -12635,7 +12835,7 @@
           <p:cNvPr id="18" name="">
             <a:extLst xmlns:a="http://schemas.openxmlformats.org/drawingml/2006/main">
               <a:ext uri="{FF2B5EF4-FFF2-40B4-BE49-F238E27FC236}">
-                <a16:creationId xmlns:a16="http://schemas.microsoft.com/office/drawing/2014/main" id="{FFA1A881-E801-49FD-953C-7BCD423A9B52}"/>
+                <a16:creationId xmlns:a16="http://schemas.microsoft.com/office/drawing/2014/main" id="{26AD5CE6-BC50-4168-8DBC-16D2C4638E3E}"/>
               </a:ext>
             </a:extLst>
           </p:cNvPr>
@@ -12669,7 +12869,7 @@
           <p:cNvPr id="19" name="">
             <a:extLst xmlns:a="http://schemas.openxmlformats.org/drawingml/2006/main">
               <a:ext uri="{FF2B5EF4-FFF2-40B4-BE49-F238E27FC236}">
-                <a16:creationId xmlns:a16="http://schemas.microsoft.com/office/drawing/2014/main" id="{97DDF41A-8E00-41C1-8DE0-47E352AAE41D}"/>
+                <a16:creationId xmlns:a16="http://schemas.microsoft.com/office/drawing/2014/main" id="{7D2A1C38-E5A6-415A-B5FE-615957B5593C}"/>
               </a:ext>
             </a:extLst>
           </p:cNvPr>
@@ -12701,7 +12901,7 @@
           <p:cNvPr id="20" name="">
             <a:extLst xmlns:a="http://schemas.openxmlformats.org/drawingml/2006/main">
               <a:ext uri="{FF2B5EF4-FFF2-40B4-BE49-F238E27FC236}">
-                <a16:creationId xmlns:a16="http://schemas.microsoft.com/office/drawing/2014/main" id="{77F7F552-1116-4E70-BAC6-A806FE244FF4}"/>
+                <a16:creationId xmlns:a16="http://schemas.microsoft.com/office/drawing/2014/main" id="{8D1AC7E2-E6C5-41C0-8524-2409844176FF}"/>
               </a:ext>
             </a:extLst>
           </p:cNvPr>
@@ -12758,7 +12958,7 @@
           <p:cNvPr id="21" name="">
             <a:extLst xmlns:a="http://schemas.openxmlformats.org/drawingml/2006/main">
               <a:ext uri="{FF2B5EF4-FFF2-40B4-BE49-F238E27FC236}">
-                <a16:creationId xmlns:a16="http://schemas.microsoft.com/office/drawing/2014/main" id="{AC4AF4B3-FFC1-4A13-A445-E61AA2118D51}"/>
+                <a16:creationId xmlns:a16="http://schemas.microsoft.com/office/drawing/2014/main" id="{9479F647-7030-48FF-80E3-70BF6EDFFE5F}"/>
               </a:ext>
             </a:extLst>
           </p:cNvPr>
@@ -12815,7 +13015,7 @@
           <p:cNvPr id="22" name="">
             <a:extLst xmlns:a="http://schemas.openxmlformats.org/drawingml/2006/main">
               <a:ext uri="{FF2B5EF4-FFF2-40B4-BE49-F238E27FC236}">
-                <a16:creationId xmlns:a16="http://schemas.microsoft.com/office/drawing/2014/main" id="{47C2E134-2375-4EE6-B071-991C399843D2}"/>
+                <a16:creationId xmlns:a16="http://schemas.microsoft.com/office/drawing/2014/main" id="{A9E46148-4C6C-4164-A78B-2BAA2EB1BB85}"/>
               </a:ext>
             </a:extLst>
           </p:cNvPr>
@@ -12870,7 +13070,7 @@
     </p:spTree>
     <p:extLst>
       <p:ext uri="{BB962C8B-B14F-4D97-AF65-F5344CB8AC3E}">
-        <p14:creationId xmlns:p14="http://schemas.microsoft.com/office/powerpoint/2010/main" val="1812443651"/>
+        <p14:creationId xmlns:p14="http://schemas.microsoft.com/office/powerpoint/2010/main" val="362945459"/>
       </p:ext>
     </p:extLst>
   </p:cSld>
@@ -13071,7 +13271,7 @@
           <p:cNvPr id="22" name="">
             <a:extLst xmlns:a="http://schemas.openxmlformats.org/drawingml/2006/main">
               <a:ext uri="{FF2B5EF4-FFF2-40B4-BE49-F238E27FC236}">
-                <a16:creationId xmlns:a16="http://schemas.microsoft.com/office/drawing/2014/main" id="{E2C69E34-8B12-491F-86EE-DCCFD1215B84}"/>
+                <a16:creationId xmlns:a16="http://schemas.microsoft.com/office/drawing/2014/main" id="{BD1F6800-1676-413E-91DD-46AAB1355205}"/>
               </a:ext>
             </a:extLst>
           </p:cNvPr>
@@ -13103,7 +13303,7 @@
           <p:cNvPr id="2" name="">
             <a:extLst xmlns:a="http://schemas.openxmlformats.org/drawingml/2006/main">
               <a:ext uri="{FF2B5EF4-FFF2-40B4-BE49-F238E27FC236}">
-                <a16:creationId xmlns:a16="http://schemas.microsoft.com/office/drawing/2014/main" id="{FD1267D7-E58E-4574-9B5E-73265E151328}"/>
+                <a16:creationId xmlns:a16="http://schemas.microsoft.com/office/drawing/2014/main" id="{77E49525-B449-4015-A2A1-2FF86E3CEBA9}"/>
               </a:ext>
             </a:extLst>
           </p:cNvPr>
@@ -13160,7 +13360,7 @@
           <p:cNvPr id="3" name="">
             <a:extLst xmlns:a="http://schemas.openxmlformats.org/drawingml/2006/main">
               <a:ext uri="{FF2B5EF4-FFF2-40B4-BE49-F238E27FC236}">
-                <a16:creationId xmlns:a16="http://schemas.microsoft.com/office/drawing/2014/main" id="{BA7D7458-DCB7-4F64-BBC1-05C200EDD7DA}"/>
+                <a16:creationId xmlns:a16="http://schemas.microsoft.com/office/drawing/2014/main" id="{8192D7C2-BDB6-4D2F-81A0-E7A85AE24025}"/>
               </a:ext>
             </a:extLst>
           </p:cNvPr>
@@ -13192,7 +13392,7 @@
           <p:cNvPr id="4" name="">
             <a:extLst xmlns:a="http://schemas.openxmlformats.org/drawingml/2006/main">
               <a:ext uri="{FF2B5EF4-FFF2-40B4-BE49-F238E27FC236}">
-                <a16:creationId xmlns:a16="http://schemas.microsoft.com/office/drawing/2014/main" id="{DFF31267-C2B9-49C5-94E5-843213F6B9D3}"/>
+                <a16:creationId xmlns:a16="http://schemas.microsoft.com/office/drawing/2014/main" id="{AC2F4B52-267E-48B5-A408-AF3877B4CB47}"/>
               </a:ext>
             </a:extLst>
           </p:cNvPr>
@@ -13249,7 +13449,7 @@
           <p:cNvPr id="5" name="">
             <a:extLst xmlns:a="http://schemas.openxmlformats.org/drawingml/2006/main">
               <a:ext uri="{FF2B5EF4-FFF2-40B4-BE49-F238E27FC236}">
-                <a16:creationId xmlns:a16="http://schemas.microsoft.com/office/drawing/2014/main" id="{F02B1166-D2B9-4CC5-AEEA-C4BD68CC7EDD}"/>
+                <a16:creationId xmlns:a16="http://schemas.microsoft.com/office/drawing/2014/main" id="{497DC5FE-B01D-47AA-8C5E-CA55C2F9D5A7}"/>
               </a:ext>
             </a:extLst>
           </p:cNvPr>
@@ -13306,7 +13506,7 @@
           <p:cNvPr id="6" name="">
             <a:extLst xmlns:a="http://schemas.openxmlformats.org/drawingml/2006/main">
               <a:ext uri="{FF2B5EF4-FFF2-40B4-BE49-F238E27FC236}">
-                <a16:creationId xmlns:a16="http://schemas.microsoft.com/office/drawing/2014/main" id="{8AC060B7-C7D8-403C-B9FA-4CB9EBFF56D4}"/>
+                <a16:creationId xmlns:a16="http://schemas.microsoft.com/office/drawing/2014/main" id="{ACDB66DF-BBE1-4F86-8176-D13D43BE39EC}"/>
               </a:ext>
             </a:extLst>
           </p:cNvPr>
@@ -13363,7 +13563,7 @@
           <p:cNvPr id="7" name="">
             <a:extLst xmlns:a="http://schemas.openxmlformats.org/drawingml/2006/main">
               <a:ext uri="{FF2B5EF4-FFF2-40B4-BE49-F238E27FC236}">
-                <a16:creationId xmlns:a16="http://schemas.microsoft.com/office/drawing/2014/main" id="{6CC3690F-5FB3-4185-9B0F-AD03F20B88C2}"/>
+                <a16:creationId xmlns:a16="http://schemas.microsoft.com/office/drawing/2014/main" id="{6386A1B6-C6A6-43AA-AB6B-B0FD1100DDF4}"/>
               </a:ext>
             </a:extLst>
           </p:cNvPr>
@@ -13395,7 +13595,7 @@
           <p:cNvPr id="8" name="">
             <a:extLst xmlns:a="http://schemas.openxmlformats.org/drawingml/2006/main">
               <a:ext uri="{FF2B5EF4-FFF2-40B4-BE49-F238E27FC236}">
-                <a16:creationId xmlns:a16="http://schemas.microsoft.com/office/drawing/2014/main" id="{24C9948D-50E7-4507-ABAF-3D38005DD714}"/>
+                <a16:creationId xmlns:a16="http://schemas.microsoft.com/office/drawing/2014/main" id="{FFCEA3DB-E8DA-47B8-A120-3AE144B721B7}"/>
               </a:ext>
             </a:extLst>
           </p:cNvPr>
@@ -13452,7 +13652,7 @@
           <p:cNvPr id="9" name="">
             <a:extLst xmlns:a="http://schemas.openxmlformats.org/drawingml/2006/main">
               <a:ext uri="{FF2B5EF4-FFF2-40B4-BE49-F238E27FC236}">
-                <a16:creationId xmlns:a16="http://schemas.microsoft.com/office/drawing/2014/main" id="{234D4A97-55E5-4BC5-8054-4D615B1C9EE3}"/>
+                <a16:creationId xmlns:a16="http://schemas.microsoft.com/office/drawing/2014/main" id="{638AD4F3-E6ED-4A4D-9526-B47497130022}"/>
               </a:ext>
             </a:extLst>
           </p:cNvPr>
@@ -13509,7 +13709,7 @@
           <p:cNvPr id="10" name="">
             <a:extLst xmlns:a="http://schemas.openxmlformats.org/drawingml/2006/main">
               <a:ext uri="{FF2B5EF4-FFF2-40B4-BE49-F238E27FC236}">
-                <a16:creationId xmlns:a16="http://schemas.microsoft.com/office/drawing/2014/main" id="{EB15714B-98BB-48A4-8DEB-BE1802D67FD0}"/>
+                <a16:creationId xmlns:a16="http://schemas.microsoft.com/office/drawing/2014/main" id="{77B91B3E-B261-4B5E-840F-C9E4F83779FB}"/>
               </a:ext>
             </a:extLst>
           </p:cNvPr>
@@ -13543,7 +13743,7 @@
           <p:cNvPr id="11" name="">
             <a:extLst xmlns:a="http://schemas.openxmlformats.org/drawingml/2006/main">
               <a:ext uri="{FF2B5EF4-FFF2-40B4-BE49-F238E27FC236}">
-                <a16:creationId xmlns:a16="http://schemas.microsoft.com/office/drawing/2014/main" id="{6708CC53-60B7-479F-B0A1-1BEBC6A44E44}"/>
+                <a16:creationId xmlns:a16="http://schemas.microsoft.com/office/drawing/2014/main" id="{B9D8735A-7EB4-43EF-8D5A-8ADBC55A573B}"/>
               </a:ext>
             </a:extLst>
           </p:cNvPr>
@@ -13575,7 +13775,7 @@
           <p:cNvPr id="12" name="">
             <a:extLst xmlns:a="http://schemas.openxmlformats.org/drawingml/2006/main">
               <a:ext uri="{FF2B5EF4-FFF2-40B4-BE49-F238E27FC236}">
-                <a16:creationId xmlns:a16="http://schemas.microsoft.com/office/drawing/2014/main" id="{332DD61A-4E3B-439C-920C-3F447C9AB8EB}"/>
+                <a16:creationId xmlns:a16="http://schemas.microsoft.com/office/drawing/2014/main" id="{CE3BF638-7D72-4F40-838D-D2CE76B0D5B4}"/>
               </a:ext>
             </a:extLst>
           </p:cNvPr>
@@ -13632,7 +13832,7 @@
           <p:cNvPr id="13" name="">
             <a:extLst xmlns:a="http://schemas.openxmlformats.org/drawingml/2006/main">
               <a:ext uri="{FF2B5EF4-FFF2-40B4-BE49-F238E27FC236}">
-                <a16:creationId xmlns:a16="http://schemas.microsoft.com/office/drawing/2014/main" id="{BD9D9BF6-998A-4161-90D7-BDF577284184}"/>
+                <a16:creationId xmlns:a16="http://schemas.microsoft.com/office/drawing/2014/main" id="{A17B2CE2-1F2A-4B1F-85B6-2C373BDCC18B}"/>
               </a:ext>
             </a:extLst>
           </p:cNvPr>
@@ -13689,7 +13889,7 @@
           <p:cNvPr id="14" name="">
             <a:extLst xmlns:a="http://schemas.openxmlformats.org/drawingml/2006/main">
               <a:ext uri="{FF2B5EF4-FFF2-40B4-BE49-F238E27FC236}">
-                <a16:creationId xmlns:a16="http://schemas.microsoft.com/office/drawing/2014/main" id="{2C349696-1B99-48CF-B45B-811D16608C13}"/>
+                <a16:creationId xmlns:a16="http://schemas.microsoft.com/office/drawing/2014/main" id="{56EBA914-D2C5-4372-B090-A06207D8FFD3}"/>
               </a:ext>
             </a:extLst>
           </p:cNvPr>
@@ -13723,7 +13923,7 @@
           <p:cNvPr id="15" name="">
             <a:extLst xmlns:a="http://schemas.openxmlformats.org/drawingml/2006/main">
               <a:ext uri="{FF2B5EF4-FFF2-40B4-BE49-F238E27FC236}">
-                <a16:creationId xmlns:a16="http://schemas.microsoft.com/office/drawing/2014/main" id="{6A5DB287-5D0B-40C3-9DD7-318B0DA2D3A3}"/>
+                <a16:creationId xmlns:a16="http://schemas.microsoft.com/office/drawing/2014/main" id="{3B1B45B4-E755-4E61-83E5-61329A3AFD91}"/>
               </a:ext>
             </a:extLst>
           </p:cNvPr>
@@ -13755,7 +13955,7 @@
           <p:cNvPr id="16" name="">
             <a:extLst xmlns:a="http://schemas.openxmlformats.org/drawingml/2006/main">
               <a:ext uri="{FF2B5EF4-FFF2-40B4-BE49-F238E27FC236}">
-                <a16:creationId xmlns:a16="http://schemas.microsoft.com/office/drawing/2014/main" id="{B771CCFD-8945-4C91-8881-B21A2A5553B7}"/>
+                <a16:creationId xmlns:a16="http://schemas.microsoft.com/office/drawing/2014/main" id="{D5F938E4-0041-4A7D-B415-00C178D8F3D6}"/>
               </a:ext>
             </a:extLst>
           </p:cNvPr>
@@ -13812,7 +14012,7 @@
           <p:cNvPr id="17" name="">
             <a:extLst xmlns:a="http://schemas.openxmlformats.org/drawingml/2006/main">
               <a:ext uri="{FF2B5EF4-FFF2-40B4-BE49-F238E27FC236}">
-                <a16:creationId xmlns:a16="http://schemas.microsoft.com/office/drawing/2014/main" id="{57269C12-B409-4A62-B745-D9F782ADCEC3}"/>
+                <a16:creationId xmlns:a16="http://schemas.microsoft.com/office/drawing/2014/main" id="{EF797CC6-1D9A-4542-B0D2-E8F600CB09E7}"/>
               </a:ext>
             </a:extLst>
           </p:cNvPr>
@@ -13869,7 +14069,7 @@
           <p:cNvPr id="18" name="">
             <a:extLst xmlns:a="http://schemas.openxmlformats.org/drawingml/2006/main">
               <a:ext uri="{FF2B5EF4-FFF2-40B4-BE49-F238E27FC236}">
-                <a16:creationId xmlns:a16="http://schemas.microsoft.com/office/drawing/2014/main" id="{B2796565-94A4-4B73-B74B-551E5F63BCC3}"/>
+                <a16:creationId xmlns:a16="http://schemas.microsoft.com/office/drawing/2014/main" id="{6BB81057-C105-4B2F-9CDB-1D85AA8CC30E}"/>
               </a:ext>
             </a:extLst>
           </p:cNvPr>
@@ -13903,7 +14103,7 @@
           <p:cNvPr id="19" name="">
             <a:extLst xmlns:a="http://schemas.openxmlformats.org/drawingml/2006/main">
               <a:ext uri="{FF2B5EF4-FFF2-40B4-BE49-F238E27FC236}">
-                <a16:creationId xmlns:a16="http://schemas.microsoft.com/office/drawing/2014/main" id="{9262C69E-A28E-4F61-859E-487021AD165D}"/>
+                <a16:creationId xmlns:a16="http://schemas.microsoft.com/office/drawing/2014/main" id="{A03CEA6A-BD84-4311-9D01-8BBD7DF71D44}"/>
               </a:ext>
             </a:extLst>
           </p:cNvPr>
@@ -13935,7 +14135,7 @@
           <p:cNvPr id="20" name="">
             <a:extLst xmlns:a="http://schemas.openxmlformats.org/drawingml/2006/main">
               <a:ext uri="{FF2B5EF4-FFF2-40B4-BE49-F238E27FC236}">
-                <a16:creationId xmlns:a16="http://schemas.microsoft.com/office/drawing/2014/main" id="{A00CE590-F76C-4E18-9291-0A7E46DC1C51}"/>
+                <a16:creationId xmlns:a16="http://schemas.microsoft.com/office/drawing/2014/main" id="{5D11C1CA-70FC-4A8A-B72B-391A9DDC55C4}"/>
               </a:ext>
             </a:extLst>
           </p:cNvPr>
@@ -13992,7 +14192,7 @@
           <p:cNvPr id="21" name="">
             <a:extLst xmlns:a="http://schemas.openxmlformats.org/drawingml/2006/main">
               <a:ext uri="{FF2B5EF4-FFF2-40B4-BE49-F238E27FC236}">
-                <a16:creationId xmlns:a16="http://schemas.microsoft.com/office/drawing/2014/main" id="{D3199CA2-75D5-4F57-8792-6A7F5B55F24B}"/>
+                <a16:creationId xmlns:a16="http://schemas.microsoft.com/office/drawing/2014/main" id="{B2131678-C35C-4044-97B0-81F590048B75}"/>
               </a:ext>
             </a:extLst>
           </p:cNvPr>
@@ -14047,7 +14247,7 @@
     </p:spTree>
     <p:extLst>
       <p:ext uri="{BB962C8B-B14F-4D97-AF65-F5344CB8AC3E}">
-        <p14:creationId xmlns:p14="http://schemas.microsoft.com/office/powerpoint/2010/main" val="1932556368"/>
+        <p14:creationId xmlns:p14="http://schemas.microsoft.com/office/powerpoint/2010/main" val="2048498947"/>
       </p:ext>
     </p:extLst>
   </p:cSld>
